--- a/docs/Image_Quality_Assessment_Presentation.pptx
+++ b/docs/Image_Quality_Assessment_Presentation.pptx
@@ -5,16 +5,13 @@
     <p:sldMasterId id="2147483648" r:id="rId1"/>
   </p:sldMasterIdLst>
   <p:sldIdLst>
-    <p:sldId id="256" r:id="rId7"/>
-    <p:sldId id="257" r:id="rId8"/>
-    <p:sldId id="258" r:id="rId9"/>
-    <p:sldId id="259" r:id="rId10"/>
-    <p:sldId id="260" r:id="rId11"/>
-    <p:sldId id="261" r:id="rId12"/>
-    <p:sldId id="262" r:id="rId13"/>
-    <p:sldId id="263" r:id="rId14"/>
+    <p:sldId id="256" r:id="rId2"/>
+    <p:sldId id="258" r:id="rId3"/>
+    <p:sldId id="260" r:id="rId4"/>
+    <p:sldId id="261" r:id="rId5"/>
+    <p:sldId id="263" r:id="rId6"/>
   </p:sldIdLst>
-  <p:sldSz cx="12191695" cy="6858000" type="screen4x3"/>
+  <p:sldSz cx="12192000" cy="6858000"/>
   <p:notesSz cx="6858000" cy="9144000"/>
   <p:defaultTextStyle>
     <a:defPPr>
@@ -111,6 +108,22 @@
       </a:defRPr>
     </a:lvl9pPr>
   </p:defaultTextStyle>
+  <p:extLst>
+    <p:ext uri="{EFAFB233-063F-42B5-8137-9DF3F51BA10A}">
+      <p15:sldGuideLst xmlns:p15="http://schemas.microsoft.com/office/powerpoint/2012/main">
+        <p15:guide id="1" orient="horz" pos="2160">
+          <p15:clr>
+            <a:srgbClr val="A4A3A4"/>
+          </p15:clr>
+        </p15:guide>
+        <p15:guide id="2" pos="2880">
+          <p15:clr>
+            <a:srgbClr val="A4A3A4"/>
+          </p15:clr>
+        </p15:guide>
+      </p15:sldGuideLst>
+    </p:ext>
+  </p:extLst>
 </p:presentation>
 </file>
 
@@ -152,10 +165,9 @@
           <a:lstStyle/>
           <a:p>
             <a:r>
-              <a:rPr lang="en-US" smtClean="0"/>
+              <a:rPr lang="en-US"/>
               <a:t>Click to edit Master title style</a:t>
             </a:r>
-            <a:endParaRPr lang="en-US"/>
           </a:p>
         </p:txBody>
       </p:sp>
@@ -271,10 +283,9 @@
           </a:lstStyle>
           <a:p>
             <a:r>
-              <a:rPr lang="en-US" smtClean="0"/>
+              <a:rPr lang="en-US"/>
               <a:t>Click to edit Master subtitle style</a:t>
             </a:r>
-            <a:endParaRPr lang="en-US"/>
           </a:p>
         </p:txBody>
       </p:sp>
@@ -295,7 +306,7 @@
           <a:p>
             <a:fld id="{5BCAD085-E8A6-8845-BD4E-CB4CCA059FC4}" type="datetimeFigureOut">
               <a:rPr lang="en-US" smtClean="0"/>
-              <a:t>1/27/13</a:t>
+              <a:t>6/24/2026</a:t>
             </a:fld>
             <a:endParaRPr lang="en-US"/>
           </a:p>
@@ -389,10 +400,9 @@
           <a:lstStyle/>
           <a:p>
             <a:r>
-              <a:rPr lang="en-US" smtClean="0"/>
+              <a:rPr lang="en-US"/>
               <a:t>Click to edit Master title style</a:t>
             </a:r>
-            <a:endParaRPr lang="en-US"/>
           </a:p>
         </p:txBody>
       </p:sp>
@@ -413,38 +423,37 @@
           <a:p>
             <a:pPr lvl="0"/>
             <a:r>
-              <a:rPr lang="en-US" smtClean="0"/>
+              <a:rPr lang="en-US"/>
               <a:t>Click to edit Master text styles</a:t>
             </a:r>
           </a:p>
           <a:p>
             <a:pPr lvl="1"/>
             <a:r>
-              <a:rPr lang="en-US" smtClean="0"/>
+              <a:rPr lang="en-US"/>
               <a:t>Second level</a:t>
             </a:r>
           </a:p>
           <a:p>
             <a:pPr lvl="2"/>
             <a:r>
-              <a:rPr lang="en-US" smtClean="0"/>
+              <a:rPr lang="en-US"/>
               <a:t>Third level</a:t>
             </a:r>
           </a:p>
           <a:p>
             <a:pPr lvl="3"/>
             <a:r>
-              <a:rPr lang="en-US" smtClean="0"/>
+              <a:rPr lang="en-US"/>
               <a:t>Fourth level</a:t>
             </a:r>
           </a:p>
           <a:p>
             <a:pPr lvl="4"/>
             <a:r>
-              <a:rPr lang="en-US" smtClean="0"/>
+              <a:rPr lang="en-US"/>
               <a:t>Fifth level</a:t>
             </a:r>
-            <a:endParaRPr lang="en-US"/>
           </a:p>
         </p:txBody>
       </p:sp>
@@ -465,7 +474,7 @@
           <a:p>
             <a:fld id="{5BCAD085-E8A6-8845-BD4E-CB4CCA059FC4}" type="datetimeFigureOut">
               <a:rPr lang="en-US" smtClean="0"/>
-              <a:t>1/27/13</a:t>
+              <a:t>6/24/2026</a:t>
             </a:fld>
             <a:endParaRPr lang="en-US"/>
           </a:p>
@@ -564,10 +573,9 @@
           <a:lstStyle/>
           <a:p>
             <a:r>
-              <a:rPr lang="en-US" smtClean="0"/>
+              <a:rPr lang="en-US"/>
               <a:t>Click to edit Master title style</a:t>
             </a:r>
-            <a:endParaRPr lang="en-US"/>
           </a:p>
         </p:txBody>
       </p:sp>
@@ -593,38 +601,37 @@
           <a:p>
             <a:pPr lvl="0"/>
             <a:r>
-              <a:rPr lang="en-US" smtClean="0"/>
+              <a:rPr lang="en-US"/>
               <a:t>Click to edit Master text styles</a:t>
             </a:r>
           </a:p>
           <a:p>
             <a:pPr lvl="1"/>
             <a:r>
-              <a:rPr lang="en-US" smtClean="0"/>
+              <a:rPr lang="en-US"/>
               <a:t>Second level</a:t>
             </a:r>
           </a:p>
           <a:p>
             <a:pPr lvl="2"/>
             <a:r>
-              <a:rPr lang="en-US" smtClean="0"/>
+              <a:rPr lang="en-US"/>
               <a:t>Third level</a:t>
             </a:r>
           </a:p>
           <a:p>
             <a:pPr lvl="3"/>
             <a:r>
-              <a:rPr lang="en-US" smtClean="0"/>
+              <a:rPr lang="en-US"/>
               <a:t>Fourth level</a:t>
             </a:r>
           </a:p>
           <a:p>
             <a:pPr lvl="4"/>
             <a:r>
-              <a:rPr lang="en-US" smtClean="0"/>
+              <a:rPr lang="en-US"/>
               <a:t>Fifth level</a:t>
             </a:r>
-            <a:endParaRPr lang="en-US"/>
           </a:p>
         </p:txBody>
       </p:sp>
@@ -645,7 +652,7 @@
           <a:p>
             <a:fld id="{5BCAD085-E8A6-8845-BD4E-CB4CCA059FC4}" type="datetimeFigureOut">
               <a:rPr lang="en-US" smtClean="0"/>
-              <a:t>1/27/13</a:t>
+              <a:t>6/24/2026</a:t>
             </a:fld>
             <a:endParaRPr lang="en-US"/>
           </a:p>
@@ -739,10 +746,9 @@
           <a:lstStyle/>
           <a:p>
             <a:r>
-              <a:rPr lang="en-US" smtClean="0"/>
+              <a:rPr lang="en-US"/>
               <a:t>Click to edit Master title style</a:t>
             </a:r>
-            <a:endParaRPr lang="en-US"/>
           </a:p>
         </p:txBody>
       </p:sp>
@@ -763,38 +769,37 @@
           <a:p>
             <a:pPr lvl="0"/>
             <a:r>
-              <a:rPr lang="en-US" smtClean="0"/>
+              <a:rPr lang="en-US"/>
               <a:t>Click to edit Master text styles</a:t>
             </a:r>
           </a:p>
           <a:p>
             <a:pPr lvl="1"/>
             <a:r>
-              <a:rPr lang="en-US" smtClean="0"/>
+              <a:rPr lang="en-US"/>
               <a:t>Second level</a:t>
             </a:r>
           </a:p>
           <a:p>
             <a:pPr lvl="2"/>
             <a:r>
-              <a:rPr lang="en-US" smtClean="0"/>
+              <a:rPr lang="en-US"/>
               <a:t>Third level</a:t>
             </a:r>
           </a:p>
           <a:p>
             <a:pPr lvl="3"/>
             <a:r>
-              <a:rPr lang="en-US" smtClean="0"/>
+              <a:rPr lang="en-US"/>
               <a:t>Fourth level</a:t>
             </a:r>
           </a:p>
           <a:p>
             <a:pPr lvl="4"/>
             <a:r>
-              <a:rPr lang="en-US" smtClean="0"/>
+              <a:rPr lang="en-US"/>
               <a:t>Fifth level</a:t>
             </a:r>
-            <a:endParaRPr lang="en-US"/>
           </a:p>
         </p:txBody>
       </p:sp>
@@ -815,7 +820,7 @@
           <a:p>
             <a:fld id="{5BCAD085-E8A6-8845-BD4E-CB4CCA059FC4}" type="datetimeFigureOut">
               <a:rPr lang="en-US" smtClean="0"/>
-              <a:t>1/27/13</a:t>
+              <a:t>6/24/2026</a:t>
             </a:fld>
             <a:endParaRPr lang="en-US"/>
           </a:p>
@@ -918,10 +923,9 @@
           </a:lstStyle>
           <a:p>
             <a:r>
-              <a:rPr lang="en-US" smtClean="0"/>
+              <a:rPr lang="en-US"/>
               <a:t>Click to edit Master title style</a:t>
             </a:r>
-            <a:endParaRPr lang="en-US"/>
           </a:p>
         </p:txBody>
       </p:sp>
@@ -1038,7 +1042,7 @@
           <a:p>
             <a:pPr lvl="0"/>
             <a:r>
-              <a:rPr lang="en-US" smtClean="0"/>
+              <a:rPr lang="en-US"/>
               <a:t>Click to edit Master text styles</a:t>
             </a:r>
           </a:p>
@@ -1061,7 +1065,7 @@
           <a:p>
             <a:fld id="{5BCAD085-E8A6-8845-BD4E-CB4CCA059FC4}" type="datetimeFigureOut">
               <a:rPr lang="en-US" smtClean="0"/>
-              <a:t>1/27/13</a:t>
+              <a:t>6/24/2026</a:t>
             </a:fld>
             <a:endParaRPr lang="en-US"/>
           </a:p>
@@ -1155,10 +1159,9 @@
           <a:lstStyle/>
           <a:p>
             <a:r>
-              <a:rPr lang="en-US" smtClean="0"/>
+              <a:rPr lang="en-US"/>
               <a:t>Click to edit Master title style</a:t>
             </a:r>
-            <a:endParaRPr lang="en-US"/>
           </a:p>
         </p:txBody>
       </p:sp>
@@ -1212,38 +1215,37 @@
           <a:p>
             <a:pPr lvl="0"/>
             <a:r>
-              <a:rPr lang="en-US" smtClean="0"/>
+              <a:rPr lang="en-US"/>
               <a:t>Click to edit Master text styles</a:t>
             </a:r>
           </a:p>
           <a:p>
             <a:pPr lvl="1"/>
             <a:r>
-              <a:rPr lang="en-US" smtClean="0"/>
+              <a:rPr lang="en-US"/>
               <a:t>Second level</a:t>
             </a:r>
           </a:p>
           <a:p>
             <a:pPr lvl="2"/>
             <a:r>
-              <a:rPr lang="en-US" smtClean="0"/>
+              <a:rPr lang="en-US"/>
               <a:t>Third level</a:t>
             </a:r>
           </a:p>
           <a:p>
             <a:pPr lvl="3"/>
             <a:r>
-              <a:rPr lang="en-US" smtClean="0"/>
+              <a:rPr lang="en-US"/>
               <a:t>Fourth level</a:t>
             </a:r>
           </a:p>
           <a:p>
             <a:pPr lvl="4"/>
             <a:r>
-              <a:rPr lang="en-US" smtClean="0"/>
+              <a:rPr lang="en-US"/>
               <a:t>Fifth level</a:t>
             </a:r>
-            <a:endParaRPr lang="en-US"/>
           </a:p>
         </p:txBody>
       </p:sp>
@@ -1297,38 +1299,37 @@
           <a:p>
             <a:pPr lvl="0"/>
             <a:r>
-              <a:rPr lang="en-US" smtClean="0"/>
+              <a:rPr lang="en-US"/>
               <a:t>Click to edit Master text styles</a:t>
             </a:r>
           </a:p>
           <a:p>
             <a:pPr lvl="1"/>
             <a:r>
-              <a:rPr lang="en-US" smtClean="0"/>
+              <a:rPr lang="en-US"/>
               <a:t>Second level</a:t>
             </a:r>
           </a:p>
           <a:p>
             <a:pPr lvl="2"/>
             <a:r>
-              <a:rPr lang="en-US" smtClean="0"/>
+              <a:rPr lang="en-US"/>
               <a:t>Third level</a:t>
             </a:r>
           </a:p>
           <a:p>
             <a:pPr lvl="3"/>
             <a:r>
-              <a:rPr lang="en-US" smtClean="0"/>
+              <a:rPr lang="en-US"/>
               <a:t>Fourth level</a:t>
             </a:r>
           </a:p>
           <a:p>
             <a:pPr lvl="4"/>
             <a:r>
-              <a:rPr lang="en-US" smtClean="0"/>
+              <a:rPr lang="en-US"/>
               <a:t>Fifth level</a:t>
             </a:r>
-            <a:endParaRPr lang="en-US"/>
           </a:p>
         </p:txBody>
       </p:sp>
@@ -1349,7 +1350,7 @@
           <a:p>
             <a:fld id="{5BCAD085-E8A6-8845-BD4E-CB4CCA059FC4}" type="datetimeFigureOut">
               <a:rPr lang="en-US" smtClean="0"/>
-              <a:t>1/27/13</a:t>
+              <a:t>6/24/2026</a:t>
             </a:fld>
             <a:endParaRPr lang="en-US"/>
           </a:p>
@@ -1447,10 +1448,9 @@
           </a:lstStyle>
           <a:p>
             <a:r>
-              <a:rPr lang="en-US" smtClean="0"/>
+              <a:rPr lang="en-US"/>
               <a:t>Click to edit Master title style</a:t>
             </a:r>
-            <a:endParaRPr lang="en-US"/>
           </a:p>
         </p:txBody>
       </p:sp>
@@ -1513,7 +1513,7 @@
           <a:p>
             <a:pPr lvl="0"/>
             <a:r>
-              <a:rPr lang="en-US" smtClean="0"/>
+              <a:rPr lang="en-US"/>
               <a:t>Click to edit Master text styles</a:t>
             </a:r>
           </a:p>
@@ -1569,38 +1569,37 @@
           <a:p>
             <a:pPr lvl="0"/>
             <a:r>
-              <a:rPr lang="en-US" smtClean="0"/>
+              <a:rPr lang="en-US"/>
               <a:t>Click to edit Master text styles</a:t>
             </a:r>
           </a:p>
           <a:p>
             <a:pPr lvl="1"/>
             <a:r>
-              <a:rPr lang="en-US" smtClean="0"/>
+              <a:rPr lang="en-US"/>
               <a:t>Second level</a:t>
             </a:r>
           </a:p>
           <a:p>
             <a:pPr lvl="2"/>
             <a:r>
-              <a:rPr lang="en-US" smtClean="0"/>
+              <a:rPr lang="en-US"/>
               <a:t>Third level</a:t>
             </a:r>
           </a:p>
           <a:p>
             <a:pPr lvl="3"/>
             <a:r>
-              <a:rPr lang="en-US" smtClean="0"/>
+              <a:rPr lang="en-US"/>
               <a:t>Fourth level</a:t>
             </a:r>
           </a:p>
           <a:p>
             <a:pPr lvl="4"/>
             <a:r>
-              <a:rPr lang="en-US" smtClean="0"/>
+              <a:rPr lang="en-US"/>
               <a:t>Fifth level</a:t>
             </a:r>
-            <a:endParaRPr lang="en-US"/>
           </a:p>
         </p:txBody>
       </p:sp>
@@ -1663,7 +1662,7 @@
           <a:p>
             <a:pPr lvl="0"/>
             <a:r>
-              <a:rPr lang="en-US" smtClean="0"/>
+              <a:rPr lang="en-US"/>
               <a:t>Click to edit Master text styles</a:t>
             </a:r>
           </a:p>
@@ -1719,38 +1718,37 @@
           <a:p>
             <a:pPr lvl="0"/>
             <a:r>
-              <a:rPr lang="en-US" smtClean="0"/>
+              <a:rPr lang="en-US"/>
               <a:t>Click to edit Master text styles</a:t>
             </a:r>
           </a:p>
           <a:p>
             <a:pPr lvl="1"/>
             <a:r>
-              <a:rPr lang="en-US" smtClean="0"/>
+              <a:rPr lang="en-US"/>
               <a:t>Second level</a:t>
             </a:r>
           </a:p>
           <a:p>
             <a:pPr lvl="2"/>
             <a:r>
-              <a:rPr lang="en-US" smtClean="0"/>
+              <a:rPr lang="en-US"/>
               <a:t>Third level</a:t>
             </a:r>
           </a:p>
           <a:p>
             <a:pPr lvl="3"/>
             <a:r>
-              <a:rPr lang="en-US" smtClean="0"/>
+              <a:rPr lang="en-US"/>
               <a:t>Fourth level</a:t>
             </a:r>
           </a:p>
           <a:p>
             <a:pPr lvl="4"/>
             <a:r>
-              <a:rPr lang="en-US" smtClean="0"/>
+              <a:rPr lang="en-US"/>
               <a:t>Fifth level</a:t>
             </a:r>
-            <a:endParaRPr lang="en-US"/>
           </a:p>
         </p:txBody>
       </p:sp>
@@ -1771,7 +1769,7 @@
           <a:p>
             <a:fld id="{5BCAD085-E8A6-8845-BD4E-CB4CCA059FC4}" type="datetimeFigureOut">
               <a:rPr lang="en-US" smtClean="0"/>
-              <a:t>1/27/13</a:t>
+              <a:t>6/24/2026</a:t>
             </a:fld>
             <a:endParaRPr lang="en-US"/>
           </a:p>
@@ -1865,10 +1863,9 @@
           <a:lstStyle/>
           <a:p>
             <a:r>
-              <a:rPr lang="en-US" smtClean="0"/>
+              <a:rPr lang="en-US"/>
               <a:t>Click to edit Master title style</a:t>
             </a:r>
-            <a:endParaRPr lang="en-US"/>
           </a:p>
         </p:txBody>
       </p:sp>
@@ -1889,7 +1886,7 @@
           <a:p>
             <a:fld id="{5BCAD085-E8A6-8845-BD4E-CB4CCA059FC4}" type="datetimeFigureOut">
               <a:rPr lang="en-US" smtClean="0"/>
-              <a:t>1/27/13</a:t>
+              <a:t>6/24/2026</a:t>
             </a:fld>
             <a:endParaRPr lang="en-US"/>
           </a:p>
@@ -1984,7 +1981,7 @@
           <a:p>
             <a:fld id="{5BCAD085-E8A6-8845-BD4E-CB4CCA059FC4}" type="datetimeFigureOut">
               <a:rPr lang="en-US" smtClean="0"/>
-              <a:t>1/27/13</a:t>
+              <a:t>6/24/2026</a:t>
             </a:fld>
             <a:endParaRPr lang="en-US"/>
           </a:p>
@@ -2087,10 +2084,9 @@
           </a:lstStyle>
           <a:p>
             <a:r>
-              <a:rPr lang="en-US" smtClean="0"/>
+              <a:rPr lang="en-US"/>
               <a:t>Click to edit Master title style</a:t>
             </a:r>
-            <a:endParaRPr lang="en-US"/>
           </a:p>
         </p:txBody>
       </p:sp>
@@ -2144,38 +2140,37 @@
           <a:p>
             <a:pPr lvl="0"/>
             <a:r>
-              <a:rPr lang="en-US" smtClean="0"/>
+              <a:rPr lang="en-US"/>
               <a:t>Click to edit Master text styles</a:t>
             </a:r>
           </a:p>
           <a:p>
             <a:pPr lvl="1"/>
             <a:r>
-              <a:rPr lang="en-US" smtClean="0"/>
+              <a:rPr lang="en-US"/>
               <a:t>Second level</a:t>
             </a:r>
           </a:p>
           <a:p>
             <a:pPr lvl="2"/>
             <a:r>
-              <a:rPr lang="en-US" smtClean="0"/>
+              <a:rPr lang="en-US"/>
               <a:t>Third level</a:t>
             </a:r>
           </a:p>
           <a:p>
             <a:pPr lvl="3"/>
             <a:r>
-              <a:rPr lang="en-US" smtClean="0"/>
+              <a:rPr lang="en-US"/>
               <a:t>Fourth level</a:t>
             </a:r>
           </a:p>
           <a:p>
             <a:pPr lvl="4"/>
             <a:r>
-              <a:rPr lang="en-US" smtClean="0"/>
+              <a:rPr lang="en-US"/>
               <a:t>Fifth level</a:t>
             </a:r>
-            <a:endParaRPr lang="en-US"/>
           </a:p>
         </p:txBody>
       </p:sp>
@@ -2238,7 +2233,7 @@
           <a:p>
             <a:pPr lvl="0"/>
             <a:r>
-              <a:rPr lang="en-US" smtClean="0"/>
+              <a:rPr lang="en-US"/>
               <a:t>Click to edit Master text styles</a:t>
             </a:r>
           </a:p>
@@ -2261,7 +2256,7 @@
           <a:p>
             <a:fld id="{5BCAD085-E8A6-8845-BD4E-CB4CCA059FC4}" type="datetimeFigureOut">
               <a:rPr lang="en-US" smtClean="0"/>
-              <a:t>1/27/13</a:t>
+              <a:t>6/24/2026</a:t>
             </a:fld>
             <a:endParaRPr lang="en-US"/>
           </a:p>
@@ -2364,10 +2359,9 @@
           </a:lstStyle>
           <a:p>
             <a:r>
-              <a:rPr lang="en-US" smtClean="0"/>
+              <a:rPr lang="en-US"/>
               <a:t>Click to edit Master title style</a:t>
             </a:r>
-            <a:endParaRPr lang="en-US"/>
           </a:p>
         </p:txBody>
       </p:sp>
@@ -2491,7 +2485,7 @@
           <a:p>
             <a:pPr lvl="0"/>
             <a:r>
-              <a:rPr lang="en-US" smtClean="0"/>
+              <a:rPr lang="en-US"/>
               <a:t>Click to edit Master text styles</a:t>
             </a:r>
           </a:p>
@@ -2514,7 +2508,7 @@
           <a:p>
             <a:fld id="{5BCAD085-E8A6-8845-BD4E-CB4CCA059FC4}" type="datetimeFigureOut">
               <a:rPr lang="en-US" smtClean="0"/>
-              <a:t>1/27/13</a:t>
+              <a:t>6/24/2026</a:t>
             </a:fld>
             <a:endParaRPr lang="en-US"/>
           </a:p>
@@ -2623,10 +2617,9 @@
           <a:lstStyle/>
           <a:p>
             <a:r>
-              <a:rPr lang="en-US" smtClean="0"/>
+              <a:rPr lang="en-US"/>
               <a:t>Click to edit Master title style</a:t>
             </a:r>
-            <a:endParaRPr lang="en-US"/>
           </a:p>
         </p:txBody>
       </p:sp>
@@ -2657,38 +2650,37 @@
           <a:p>
             <a:pPr lvl="0"/>
             <a:r>
-              <a:rPr lang="en-US" smtClean="0"/>
+              <a:rPr lang="en-US"/>
               <a:t>Click to edit Master text styles</a:t>
             </a:r>
           </a:p>
           <a:p>
             <a:pPr lvl="1"/>
             <a:r>
-              <a:rPr lang="en-US" smtClean="0"/>
+              <a:rPr lang="en-US"/>
               <a:t>Second level</a:t>
             </a:r>
           </a:p>
           <a:p>
             <a:pPr lvl="2"/>
             <a:r>
-              <a:rPr lang="en-US" smtClean="0"/>
+              <a:rPr lang="en-US"/>
               <a:t>Third level</a:t>
             </a:r>
           </a:p>
           <a:p>
             <a:pPr lvl="3"/>
             <a:r>
-              <a:rPr lang="en-US" smtClean="0"/>
+              <a:rPr lang="en-US"/>
               <a:t>Fourth level</a:t>
             </a:r>
           </a:p>
           <a:p>
             <a:pPr lvl="4"/>
             <a:r>
-              <a:rPr lang="en-US" smtClean="0"/>
+              <a:rPr lang="en-US"/>
               <a:t>Fifth level</a:t>
             </a:r>
-            <a:endParaRPr lang="en-US"/>
           </a:p>
         </p:txBody>
       </p:sp>
@@ -2727,7 +2719,7 @@
           <a:p>
             <a:fld id="{5BCAD085-E8A6-8845-BD4E-CB4CCA059FC4}" type="datetimeFigureOut">
               <a:rPr lang="en-US" smtClean="0"/>
-              <a:t>1/27/13</a:t>
+              <a:t>6/24/2026</a:t>
             </a:fld>
             <a:endParaRPr lang="en-US"/>
           </a:p>
@@ -3086,12 +3078,12 @@
 </file>
 
 <file path=ppt/slides/slide1.xml><?xml version="1.0" encoding="utf-8"?>
-<p:sld xmlns:a="http://schemas.openxmlformats.org/drawingml/2006/main" xmlns:p="http://schemas.openxmlformats.org/presentationml/2006/main" xmlns:r="http://schemas.openxmlformats.org/officeDocument/2006/relationships">
+<p:sld xmlns:a="http://schemas.openxmlformats.org/drawingml/2006/main" xmlns:r="http://schemas.openxmlformats.org/officeDocument/2006/relationships" xmlns:p="http://schemas.openxmlformats.org/presentationml/2006/main">
   <p:cSld>
     <p:bg>
       <p:bgPr>
         <a:solidFill>
-          <a:srgbClr val="EAF1F8"/>
+          <a:srgbClr val="EEF4FA"/>
         </a:solidFill>
         <a:effectLst/>
       </p:bgPr>
@@ -3102,17 +3094,112 @@
         <p:cNvGrpSpPr/>
         <p:nvPr/>
       </p:nvGrpSpPr>
-      <p:grpSpPr/>
-      <p:sp>
-        <p:nvSpPr>
-          <p:cNvPr id="2" name="TextBox 1"/>
+      <p:grpSpPr>
+        <a:xfrm>
+          <a:off x="0" y="0"/>
+          <a:ext cx="0" cy="0"/>
+          <a:chOff x="0" y="0"/>
+          <a:chExt cx="0" cy="0"/>
+        </a:xfrm>
+      </p:grpSpPr>
+      <p:sp>
+        <p:nvSpPr>
+          <p:cNvPr id="2" name="Rectangle 1"/>
+          <p:cNvSpPr/>
+          <p:nvPr/>
+        </p:nvSpPr>
+        <p:spPr>
+          <a:xfrm>
+            <a:off x="0" y="0"/>
+            <a:ext cx="12191695" cy="292608"/>
+          </a:xfrm>
+          <a:prstGeom prst="rect">
+            <a:avLst/>
+          </a:prstGeom>
+          <a:solidFill>
+            <a:srgbClr val="1F3552"/>
+          </a:solidFill>
+          <a:ln>
+            <a:noFill/>
+          </a:ln>
+        </p:spPr>
+        <p:style>
+          <a:lnRef idx="1">
+            <a:schemeClr val="accent1"/>
+          </a:lnRef>
+          <a:fillRef idx="3">
+            <a:schemeClr val="accent1"/>
+          </a:fillRef>
+          <a:effectRef idx="2">
+            <a:schemeClr val="accent1"/>
+          </a:effectRef>
+          <a:fontRef idx="minor">
+            <a:schemeClr val="lt1"/>
+          </a:fontRef>
+        </p:style>
+        <p:txBody>
+          <a:bodyPr rtlCol="0" anchor="ctr"/>
+          <a:lstStyle/>
+          <a:p>
+            <a:pPr algn="ctr"/>
+            <a:endParaRPr/>
+          </a:p>
+        </p:txBody>
+      </p:sp>
+      <p:sp>
+        <p:nvSpPr>
+          <p:cNvPr id="3" name="Rounded Rectangle 2"/>
+          <p:cNvSpPr/>
+          <p:nvPr/>
+        </p:nvSpPr>
+        <p:spPr>
+          <a:xfrm>
+            <a:off x="8046720" y="777240"/>
+            <a:ext cx="3246120" cy="5029200"/>
+          </a:xfrm>
+          <a:prstGeom prst="roundRect">
+            <a:avLst/>
+          </a:prstGeom>
+          <a:solidFill>
+            <a:srgbClr val="DCE8F5"/>
+          </a:solidFill>
+          <a:ln>
+            <a:noFill/>
+          </a:ln>
+        </p:spPr>
+        <p:style>
+          <a:lnRef idx="1">
+            <a:schemeClr val="accent1"/>
+          </a:lnRef>
+          <a:fillRef idx="3">
+            <a:schemeClr val="accent1"/>
+          </a:fillRef>
+          <a:effectRef idx="2">
+            <a:schemeClr val="accent1"/>
+          </a:effectRef>
+          <a:fontRef idx="minor">
+            <a:schemeClr val="lt1"/>
+          </a:fontRef>
+        </p:style>
+        <p:txBody>
+          <a:bodyPr rtlCol="0" anchor="ctr"/>
+          <a:lstStyle/>
+          <a:p>
+            <a:pPr algn="ctr"/>
+            <a:endParaRPr/>
+          </a:p>
+        </p:txBody>
+      </p:sp>
+      <p:sp>
+        <p:nvSpPr>
+          <p:cNvPr id="5" name="TextBox 4"/>
           <p:cNvSpPr txBox="1"/>
           <p:nvPr/>
         </p:nvSpPr>
         <p:spPr>
           <a:xfrm>
-            <a:off x="731520" y="822960"/>
-            <a:ext cx="9601200" cy="640080"/>
+            <a:off x="685800" y="1188720"/>
+            <a:ext cx="5029200" cy="2103120"/>
           </a:xfrm>
           <a:prstGeom prst="rect">
             <a:avLst/>
@@ -3120,35 +3207,43 @@
           <a:noFill/>
         </p:spPr>
         <p:txBody>
-          <a:bodyPr wrap="none">
+          <a:bodyPr wrap="square" anchor="t">
             <a:spAutoFit/>
           </a:bodyPr>
           <a:lstStyle/>
           <a:p>
-            <a:pPr>
-              <a:defRPr sz="2400" b="1">
-                <a:solidFill>
-                  <a:srgbClr val="203047"/>
+            <a:pPr algn="l">
+              <a:defRPr sz="2600" b="1">
+                <a:solidFill>
+                  <a:srgbClr val="1F3552"/>
                 </a:solidFill>
                 <a:latin typeface="Aptos"/>
               </a:defRPr>
             </a:pPr>
             <a:r>
-              <a:t>Image Quality Assessment &amp; Enhancement Web App</a:t>
-            </a:r>
-          </a:p>
-        </p:txBody>
-      </p:sp>
-      <p:sp>
-        <p:nvSpPr>
-          <p:cNvPr id="3" name="TextBox 2"/>
+              <a:t>Image Quality</a:t>
+            </a:r>
+            <a:br/>
+            <a:r>
+              <a:t>Assessment &amp;</a:t>
+            </a:r>
+            <a:br/>
+            <a:r>
+              <a:t>Enhancement</a:t>
+            </a:r>
+          </a:p>
+        </p:txBody>
+      </p:sp>
+      <p:sp>
+        <p:nvSpPr>
+          <p:cNvPr id="6" name="TextBox 5"/>
           <p:cNvSpPr txBox="1"/>
           <p:nvPr/>
         </p:nvSpPr>
         <p:spPr>
           <a:xfrm>
-            <a:off x="731520" y="1737360"/>
-            <a:ext cx="7772400" cy="1097280"/>
+            <a:off x="713232" y="3931920"/>
+            <a:ext cx="4754880" cy="640080"/>
           </a:xfrm>
           <a:prstGeom prst="rect">
             <a:avLst/>
@@ -3156,21 +3251,375 @@
           <a:noFill/>
         </p:spPr>
         <p:txBody>
-          <a:bodyPr wrap="none">
+          <a:bodyPr wrap="square" anchor="t">
             <a:spAutoFit/>
           </a:bodyPr>
           <a:lstStyle/>
           <a:p>
-            <a:pPr>
-              <a:defRPr sz="1800">
-                <a:solidFill>
-                  <a:srgbClr val="456B94"/>
+            <a:pPr algn="l">
+              <a:defRPr sz="1600" b="0">
+                <a:solidFill>
+                  <a:srgbClr val="617892"/>
                 </a:solidFill>
                 <a:latin typeface="Aptos"/>
               </a:defRPr>
             </a:pPr>
             <a:r>
               <a:t>Assessment-first image enhancement using Flask, OpenCV, and Next.js</a:t>
+            </a:r>
+          </a:p>
+        </p:txBody>
+      </p:sp>
+      <p:sp>
+        <p:nvSpPr>
+          <p:cNvPr id="7" name="Rounded Rectangle 6"/>
+          <p:cNvSpPr/>
+          <p:nvPr/>
+        </p:nvSpPr>
+        <p:spPr>
+          <a:xfrm>
+            <a:off x="7315200" y="1234440"/>
+            <a:ext cx="3566160" cy="1188720"/>
+          </a:xfrm>
+          <a:prstGeom prst="roundRect">
+            <a:avLst/>
+          </a:prstGeom>
+          <a:solidFill>
+            <a:srgbClr val="FFFFFF"/>
+          </a:solidFill>
+          <a:ln w="12700">
+            <a:solidFill>
+              <a:srgbClr val="C8D5E3"/>
+            </a:solidFill>
+          </a:ln>
+        </p:spPr>
+        <p:style>
+          <a:lnRef idx="1">
+            <a:schemeClr val="accent1"/>
+          </a:lnRef>
+          <a:fillRef idx="3">
+            <a:schemeClr val="accent1"/>
+          </a:fillRef>
+          <a:effectRef idx="2">
+            <a:schemeClr val="accent1"/>
+          </a:effectRef>
+          <a:fontRef idx="minor">
+            <a:schemeClr val="lt1"/>
+          </a:fontRef>
+        </p:style>
+        <p:txBody>
+          <a:bodyPr rtlCol="0" anchor="ctr"/>
+          <a:lstStyle/>
+          <a:p>
+            <a:pPr algn="ctr"/>
+            <a:endParaRPr/>
+          </a:p>
+        </p:txBody>
+      </p:sp>
+      <p:sp>
+        <p:nvSpPr>
+          <p:cNvPr id="8" name="TextBox 7"/>
+          <p:cNvSpPr txBox="1"/>
+          <p:nvPr/>
+        </p:nvSpPr>
+        <p:spPr>
+          <a:xfrm>
+            <a:off x="7479792" y="1362456"/>
+            <a:ext cx="3291840" cy="256032"/>
+          </a:xfrm>
+          <a:prstGeom prst="rect">
+            <a:avLst/>
+          </a:prstGeom>
+          <a:noFill/>
+        </p:spPr>
+        <p:txBody>
+          <a:bodyPr wrap="square" anchor="t">
+            <a:spAutoFit/>
+          </a:bodyPr>
+          <a:lstStyle/>
+          <a:p>
+            <a:pPr algn="l">
+              <a:defRPr sz="1600" b="1">
+                <a:solidFill>
+                  <a:srgbClr val="1F3552"/>
+                </a:solidFill>
+                <a:latin typeface="Aptos"/>
+              </a:defRPr>
+            </a:pPr>
+            <a:r>
+              <a:t>Key Idea</a:t>
+            </a:r>
+          </a:p>
+        </p:txBody>
+      </p:sp>
+      <p:sp>
+        <p:nvSpPr>
+          <p:cNvPr id="9" name="TextBox 8"/>
+          <p:cNvSpPr txBox="1"/>
+          <p:nvPr/>
+        </p:nvSpPr>
+        <p:spPr>
+          <a:xfrm>
+            <a:off x="7479792" y="1673352"/>
+            <a:ext cx="3291840" cy="685800"/>
+          </a:xfrm>
+          <a:prstGeom prst="rect">
+            <a:avLst/>
+          </a:prstGeom>
+          <a:noFill/>
+        </p:spPr>
+        <p:txBody>
+          <a:bodyPr wrap="square" anchor="t">
+            <a:spAutoFit/>
+          </a:bodyPr>
+          <a:lstStyle/>
+          <a:p>
+            <a:pPr algn="l">
+              <a:defRPr sz="1100" b="0">
+                <a:solidFill>
+                  <a:srgbClr val="617892"/>
+                </a:solidFill>
+                <a:latin typeface="Aptos"/>
+              </a:defRPr>
+            </a:pPr>
+            <a:r>
+              <a:t>Do not enhance every image blindly. First assess quality, then preserve or improve.</a:t>
+            </a:r>
+          </a:p>
+        </p:txBody>
+      </p:sp>
+      <p:sp>
+        <p:nvSpPr>
+          <p:cNvPr id="10" name="Rounded Rectangle 9"/>
+          <p:cNvSpPr/>
+          <p:nvPr/>
+        </p:nvSpPr>
+        <p:spPr>
+          <a:xfrm>
+            <a:off x="7315200" y="2697480"/>
+            <a:ext cx="3566160" cy="1188720"/>
+          </a:xfrm>
+          <a:prstGeom prst="roundRect">
+            <a:avLst/>
+          </a:prstGeom>
+          <a:solidFill>
+            <a:srgbClr val="FFFFFF"/>
+          </a:solidFill>
+          <a:ln w="12700">
+            <a:solidFill>
+              <a:srgbClr val="C8D5E3"/>
+            </a:solidFill>
+          </a:ln>
+        </p:spPr>
+        <p:style>
+          <a:lnRef idx="1">
+            <a:schemeClr val="accent1"/>
+          </a:lnRef>
+          <a:fillRef idx="3">
+            <a:schemeClr val="accent1"/>
+          </a:fillRef>
+          <a:effectRef idx="2">
+            <a:schemeClr val="accent1"/>
+          </a:effectRef>
+          <a:fontRef idx="minor">
+            <a:schemeClr val="lt1"/>
+          </a:fontRef>
+        </p:style>
+        <p:txBody>
+          <a:bodyPr rtlCol="0" anchor="ctr"/>
+          <a:lstStyle/>
+          <a:p>
+            <a:pPr algn="ctr"/>
+            <a:endParaRPr/>
+          </a:p>
+        </p:txBody>
+      </p:sp>
+      <p:sp>
+        <p:nvSpPr>
+          <p:cNvPr id="11" name="TextBox 10"/>
+          <p:cNvSpPr txBox="1"/>
+          <p:nvPr/>
+        </p:nvSpPr>
+        <p:spPr>
+          <a:xfrm>
+            <a:off x="7479792" y="2825496"/>
+            <a:ext cx="3291840" cy="256032"/>
+          </a:xfrm>
+          <a:prstGeom prst="rect">
+            <a:avLst/>
+          </a:prstGeom>
+          <a:noFill/>
+        </p:spPr>
+        <p:txBody>
+          <a:bodyPr wrap="square" anchor="t">
+            <a:spAutoFit/>
+          </a:bodyPr>
+          <a:lstStyle/>
+          <a:p>
+            <a:pPr algn="l">
+              <a:defRPr sz="1600" b="1">
+                <a:solidFill>
+                  <a:srgbClr val="1F3552"/>
+                </a:solidFill>
+                <a:latin typeface="Aptos"/>
+              </a:defRPr>
+            </a:pPr>
+            <a:r>
+              <a:t>Threshold Rule</a:t>
+            </a:r>
+          </a:p>
+        </p:txBody>
+      </p:sp>
+      <p:sp>
+        <p:nvSpPr>
+          <p:cNvPr id="12" name="TextBox 11"/>
+          <p:cNvSpPr txBox="1"/>
+          <p:nvPr/>
+        </p:nvSpPr>
+        <p:spPr>
+          <a:xfrm>
+            <a:off x="7479792" y="3136392"/>
+            <a:ext cx="3291840" cy="685800"/>
+          </a:xfrm>
+          <a:prstGeom prst="rect">
+            <a:avLst/>
+          </a:prstGeom>
+          <a:noFill/>
+        </p:spPr>
+        <p:txBody>
+          <a:bodyPr wrap="square" anchor="t">
+            <a:spAutoFit/>
+          </a:bodyPr>
+          <a:lstStyle/>
+          <a:p>
+            <a:pPr algn="l">
+              <a:defRPr sz="1100" b="0">
+                <a:solidFill>
+                  <a:srgbClr val="617892"/>
+                </a:solidFill>
+                <a:latin typeface="Aptos"/>
+              </a:defRPr>
+            </a:pPr>
+            <a:r>
+              <a:t>Images already above 90% quality are kept unchanged to avoid over-processing.</a:t>
+            </a:r>
+          </a:p>
+        </p:txBody>
+      </p:sp>
+      <p:sp>
+        <p:nvSpPr>
+          <p:cNvPr id="13" name="Rounded Rectangle 12"/>
+          <p:cNvSpPr/>
+          <p:nvPr/>
+        </p:nvSpPr>
+        <p:spPr>
+          <a:xfrm>
+            <a:off x="7315200" y="4160520"/>
+            <a:ext cx="3566160" cy="1188720"/>
+          </a:xfrm>
+          <a:prstGeom prst="roundRect">
+            <a:avLst/>
+          </a:prstGeom>
+          <a:solidFill>
+            <a:srgbClr val="FFFFFF"/>
+          </a:solidFill>
+          <a:ln w="12700">
+            <a:solidFill>
+              <a:srgbClr val="C8D5E3"/>
+            </a:solidFill>
+          </a:ln>
+        </p:spPr>
+        <p:style>
+          <a:lnRef idx="1">
+            <a:schemeClr val="accent1"/>
+          </a:lnRef>
+          <a:fillRef idx="3">
+            <a:schemeClr val="accent1"/>
+          </a:fillRef>
+          <a:effectRef idx="2">
+            <a:schemeClr val="accent1"/>
+          </a:effectRef>
+          <a:fontRef idx="minor">
+            <a:schemeClr val="lt1"/>
+          </a:fontRef>
+        </p:style>
+        <p:txBody>
+          <a:bodyPr rtlCol="0" anchor="ctr"/>
+          <a:lstStyle/>
+          <a:p>
+            <a:pPr algn="ctr"/>
+            <a:endParaRPr/>
+          </a:p>
+        </p:txBody>
+      </p:sp>
+      <p:sp>
+        <p:nvSpPr>
+          <p:cNvPr id="14" name="TextBox 13"/>
+          <p:cNvSpPr txBox="1"/>
+          <p:nvPr/>
+        </p:nvSpPr>
+        <p:spPr>
+          <a:xfrm>
+            <a:off x="7479792" y="4288536"/>
+            <a:ext cx="3291840" cy="256032"/>
+          </a:xfrm>
+          <a:prstGeom prst="rect">
+            <a:avLst/>
+          </a:prstGeom>
+          <a:noFill/>
+        </p:spPr>
+        <p:txBody>
+          <a:bodyPr wrap="square" anchor="t">
+            <a:spAutoFit/>
+          </a:bodyPr>
+          <a:lstStyle/>
+          <a:p>
+            <a:pPr algn="l">
+              <a:defRPr sz="1600" b="1">
+                <a:solidFill>
+                  <a:srgbClr val="1F3552"/>
+                </a:solidFill>
+                <a:latin typeface="Aptos"/>
+              </a:defRPr>
+            </a:pPr>
+            <a:r>
+              <a:t>Output</a:t>
+            </a:r>
+          </a:p>
+        </p:txBody>
+      </p:sp>
+      <p:sp>
+        <p:nvSpPr>
+          <p:cNvPr id="15" name="TextBox 14"/>
+          <p:cNvSpPr txBox="1"/>
+          <p:nvPr/>
+        </p:nvSpPr>
+        <p:spPr>
+          <a:xfrm>
+            <a:off x="7479792" y="4599432"/>
+            <a:ext cx="3291840" cy="685800"/>
+          </a:xfrm>
+          <a:prstGeom prst="rect">
+            <a:avLst/>
+          </a:prstGeom>
+          <a:noFill/>
+        </p:spPr>
+        <p:txBody>
+          <a:bodyPr wrap="square" anchor="t">
+            <a:spAutoFit/>
+          </a:bodyPr>
+          <a:lstStyle/>
+          <a:p>
+            <a:pPr algn="l">
+              <a:defRPr sz="1100" b="0">
+                <a:solidFill>
+                  <a:srgbClr val="617892"/>
+                </a:solidFill>
+                <a:latin typeface="Aptos"/>
+              </a:defRPr>
+            </a:pPr>
+            <a:r>
+              <a:t>Original vs processed image, quality score, metrics, detected issues, and downloadable result.</a:t>
             </a:r>
           </a:p>
         </p:txBody>
@@ -3184,12 +3633,12 @@
 </file>
 
 <file path=ppt/slides/slide2.xml><?xml version="1.0" encoding="utf-8"?>
-<p:sld xmlns:a="http://schemas.openxmlformats.org/drawingml/2006/main" xmlns:p="http://schemas.openxmlformats.org/presentationml/2006/main" xmlns:r="http://schemas.openxmlformats.org/officeDocument/2006/relationships">
+<p:sld xmlns:a="http://schemas.openxmlformats.org/drawingml/2006/main" xmlns:r="http://schemas.openxmlformats.org/officeDocument/2006/relationships" xmlns:p="http://schemas.openxmlformats.org/presentationml/2006/main">
   <p:cSld>
     <p:bg>
       <p:bgPr>
         <a:solidFill>
-          <a:srgbClr val="F7FAFD"/>
+          <a:srgbClr val="FFFFFF"/>
         </a:solidFill>
         <a:effectLst/>
       </p:bgPr>
@@ -3200,7 +3649,14 @@
         <p:cNvGrpSpPr/>
         <p:nvPr/>
       </p:nvGrpSpPr>
-      <p:grpSpPr/>
+      <p:grpSpPr>
+        <a:xfrm>
+          <a:off x="0" y="0"/>
+          <a:ext cx="0" cy="0"/>
+          <a:chOff x="0" y="0"/>
+          <a:chExt cx="0" cy="0"/>
+        </a:xfrm>
+      </p:grpSpPr>
       <p:sp>
         <p:nvSpPr>
           <p:cNvPr id="2" name="TextBox 1"/>
@@ -3209,8 +3665,8 @@
         </p:nvSpPr>
         <p:spPr>
           <a:xfrm>
-            <a:off x="548640" y="365760"/>
-            <a:ext cx="7315200" cy="457200"/>
+            <a:off x="594360" y="320040"/>
+            <a:ext cx="4114800" cy="228600"/>
           </a:xfrm>
           <a:prstGeom prst="rect">
             <a:avLst/>
@@ -3218,21 +3674,21 @@
           <a:noFill/>
         </p:spPr>
         <p:txBody>
-          <a:bodyPr wrap="none">
+          <a:bodyPr wrap="square" anchor="t">
             <a:spAutoFit/>
           </a:bodyPr>
           <a:lstStyle/>
           <a:p>
-            <a:pPr>
-              <a:defRPr sz="2400" b="1">
-                <a:solidFill>
-                  <a:srgbClr val="203047"/>
+            <a:pPr algn="l">
+              <a:defRPr sz="1000" b="1">
+                <a:solidFill>
+                  <a:srgbClr val="4C77A8"/>
                 </a:solidFill>
                 <a:latin typeface="Aptos"/>
               </a:defRPr>
             </a:pPr>
             <a:r>
-              <a:t>Problem Statement</a:t>
+              <a:t>WORKFLOW</a:t>
             </a:r>
           </a:p>
         </p:txBody>
@@ -3245,8 +3701,8 @@
         </p:nvSpPr>
         <p:spPr>
           <a:xfrm>
-            <a:off x="777240" y="1097280"/>
-            <a:ext cx="10241280" cy="4114800"/>
+            <a:off x="594360" y="576072"/>
+            <a:ext cx="9601200" cy="502920"/>
           </a:xfrm>
           <a:prstGeom prst="rect">
             <a:avLst/>
@@ -3254,56 +3710,751 @@
           <a:noFill/>
         </p:spPr>
         <p:txBody>
-          <a:bodyPr wrap="none">
+          <a:bodyPr wrap="square" anchor="t">
             <a:spAutoFit/>
           </a:bodyPr>
           <a:lstStyle/>
           <a:p>
-            <a:pPr>
-              <a:spcAft>
-                <a:spcPts val="1000"/>
-              </a:spcAft>
-              <a:defRPr sz="1800">
-                <a:solidFill>
-                  <a:srgbClr val="203047"/>
+            <a:pPr algn="l">
+              <a:defRPr sz="2400" b="1">
+                <a:solidFill>
+                  <a:srgbClr val="1F3552"/>
                 </a:solidFill>
                 <a:latin typeface="Aptos"/>
               </a:defRPr>
             </a:pPr>
             <a:r>
-              <a:t>Many images suffer from low brightness, weak contrast, visible noise, and soft details.</a:t>
-            </a:r>
-          </a:p>
-          <a:p>
-            <a:pPr>
-              <a:spcAft>
-                <a:spcPts val="1000"/>
-              </a:spcAft>
-              <a:defRPr sz="1800">
-                <a:solidFill>
-                  <a:srgbClr val="203047"/>
+              <a:t>End-to-end system flow</a:t>
+            </a:r>
+          </a:p>
+        </p:txBody>
+      </p:sp>
+      <p:sp>
+        <p:nvSpPr>
+          <p:cNvPr id="4" name="Rounded Rectangle 3"/>
+          <p:cNvSpPr/>
+          <p:nvPr/>
+        </p:nvSpPr>
+        <p:spPr>
+          <a:xfrm>
+            <a:off x="685800" y="1828800"/>
+            <a:ext cx="2057400" cy="2011680"/>
+          </a:xfrm>
+          <a:prstGeom prst="roundRect">
+            <a:avLst/>
+          </a:prstGeom>
+          <a:solidFill>
+            <a:srgbClr val="EEF4FA"/>
+          </a:solidFill>
+          <a:ln w="12700">
+            <a:solidFill>
+              <a:srgbClr val="C8D5E3"/>
+            </a:solidFill>
+          </a:ln>
+        </p:spPr>
+        <p:style>
+          <a:lnRef idx="1">
+            <a:schemeClr val="accent1"/>
+          </a:lnRef>
+          <a:fillRef idx="3">
+            <a:schemeClr val="accent1"/>
+          </a:fillRef>
+          <a:effectRef idx="2">
+            <a:schemeClr val="accent1"/>
+          </a:effectRef>
+          <a:fontRef idx="minor">
+            <a:schemeClr val="lt1"/>
+          </a:fontRef>
+        </p:style>
+        <p:txBody>
+          <a:bodyPr rtlCol="0" anchor="ctr"/>
+          <a:lstStyle/>
+          <a:p>
+            <a:pPr algn="ctr"/>
+            <a:endParaRPr/>
+          </a:p>
+        </p:txBody>
+      </p:sp>
+      <p:sp>
+        <p:nvSpPr>
+          <p:cNvPr id="5" name="TextBox 4"/>
+          <p:cNvSpPr txBox="1"/>
+          <p:nvPr/>
+        </p:nvSpPr>
+        <p:spPr>
+          <a:xfrm>
+            <a:off x="850392" y="1956816"/>
+            <a:ext cx="1783080" cy="256032"/>
+          </a:xfrm>
+          <a:prstGeom prst="rect">
+            <a:avLst/>
+          </a:prstGeom>
+          <a:noFill/>
+        </p:spPr>
+        <p:txBody>
+          <a:bodyPr wrap="square" anchor="t">
+            <a:spAutoFit/>
+          </a:bodyPr>
+          <a:lstStyle/>
+          <a:p>
+            <a:pPr algn="l">
+              <a:defRPr sz="1600" b="1">
+                <a:solidFill>
+                  <a:srgbClr val="1F3552"/>
                 </a:solidFill>
                 <a:latin typeface="Aptos"/>
               </a:defRPr>
             </a:pPr>
             <a:r>
-              <a:t>Applying the same enhancement to every image often over-processes already good inputs.</a:t>
-            </a:r>
-          </a:p>
-          <a:p>
-            <a:pPr>
-              <a:spcAft>
-                <a:spcPts val="1000"/>
-              </a:spcAft>
-              <a:defRPr sz="1800">
-                <a:solidFill>
-                  <a:srgbClr val="203047"/>
+              <a:t>1. Upload</a:t>
+            </a:r>
+          </a:p>
+        </p:txBody>
+      </p:sp>
+      <p:sp>
+        <p:nvSpPr>
+          <p:cNvPr id="6" name="TextBox 5"/>
+          <p:cNvSpPr txBox="1"/>
+          <p:nvPr/>
+        </p:nvSpPr>
+        <p:spPr>
+          <a:xfrm>
+            <a:off x="850392" y="2267712"/>
+            <a:ext cx="1783080" cy="1508760"/>
+          </a:xfrm>
+          <a:prstGeom prst="rect">
+            <a:avLst/>
+          </a:prstGeom>
+          <a:noFill/>
+        </p:spPr>
+        <p:txBody>
+          <a:bodyPr wrap="square" anchor="t">
+            <a:spAutoFit/>
+          </a:bodyPr>
+          <a:lstStyle/>
+          <a:p>
+            <a:pPr algn="l">
+              <a:defRPr sz="1100" b="0">
+                <a:solidFill>
+                  <a:srgbClr val="617892"/>
                 </a:solidFill>
                 <a:latin typeface="Aptos"/>
               </a:defRPr>
             </a:pPr>
             <a:r>
-              <a:t>This project solves that by assessing image quality first and enhancing only when necessary.</a:t>
+              <a:t>User uploads an image and sees the preview immediately.</a:t>
+            </a:r>
+          </a:p>
+        </p:txBody>
+      </p:sp>
+      <p:cxnSp>
+        <p:nvCxnSpPr>
+          <p:cNvPr id="7" name="Connector 6"/>
+          <p:cNvCxnSpPr/>
+          <p:nvPr/>
+        </p:nvCxnSpPr>
+        <p:spPr>
+          <a:xfrm>
+            <a:off x="2743200" y="2788920"/>
+            <a:ext cx="182880" cy="0"/>
+          </a:xfrm>
+          <a:prstGeom prst="line">
+            <a:avLst/>
+          </a:prstGeom>
+          <a:ln w="25400">
+            <a:solidFill>
+              <a:srgbClr val="4C77A8"/>
+            </a:solidFill>
+          </a:ln>
+        </p:spPr>
+        <p:style>
+          <a:lnRef idx="2">
+            <a:schemeClr val="accent1"/>
+          </a:lnRef>
+          <a:fillRef idx="0">
+            <a:schemeClr val="accent1"/>
+          </a:fillRef>
+          <a:effectRef idx="1">
+            <a:schemeClr val="accent1"/>
+          </a:effectRef>
+          <a:fontRef idx="minor">
+            <a:schemeClr val="tx1"/>
+          </a:fontRef>
+        </p:style>
+      </p:cxnSp>
+      <p:sp>
+        <p:nvSpPr>
+          <p:cNvPr id="8" name="Rounded Rectangle 7"/>
+          <p:cNvSpPr/>
+          <p:nvPr/>
+        </p:nvSpPr>
+        <p:spPr>
+          <a:xfrm>
+            <a:off x="2926080" y="1828800"/>
+            <a:ext cx="2057400" cy="2011680"/>
+          </a:xfrm>
+          <a:prstGeom prst="roundRect">
+            <a:avLst/>
+          </a:prstGeom>
+          <a:solidFill>
+            <a:srgbClr val="FFFFFF"/>
+          </a:solidFill>
+          <a:ln w="12700">
+            <a:solidFill>
+              <a:srgbClr val="C8D5E3"/>
+            </a:solidFill>
+          </a:ln>
+        </p:spPr>
+        <p:style>
+          <a:lnRef idx="1">
+            <a:schemeClr val="accent1"/>
+          </a:lnRef>
+          <a:fillRef idx="3">
+            <a:schemeClr val="accent1"/>
+          </a:fillRef>
+          <a:effectRef idx="2">
+            <a:schemeClr val="accent1"/>
+          </a:effectRef>
+          <a:fontRef idx="minor">
+            <a:schemeClr val="lt1"/>
+          </a:fontRef>
+        </p:style>
+        <p:txBody>
+          <a:bodyPr rtlCol="0" anchor="ctr"/>
+          <a:lstStyle/>
+          <a:p>
+            <a:pPr algn="ctr"/>
+            <a:endParaRPr/>
+          </a:p>
+        </p:txBody>
+      </p:sp>
+      <p:sp>
+        <p:nvSpPr>
+          <p:cNvPr id="9" name="TextBox 8"/>
+          <p:cNvSpPr txBox="1"/>
+          <p:nvPr/>
+        </p:nvSpPr>
+        <p:spPr>
+          <a:xfrm>
+            <a:off x="3090672" y="1956816"/>
+            <a:ext cx="1783080" cy="256032"/>
+          </a:xfrm>
+          <a:prstGeom prst="rect">
+            <a:avLst/>
+          </a:prstGeom>
+          <a:noFill/>
+        </p:spPr>
+        <p:txBody>
+          <a:bodyPr wrap="square" anchor="t">
+            <a:spAutoFit/>
+          </a:bodyPr>
+          <a:lstStyle/>
+          <a:p>
+            <a:pPr algn="l">
+              <a:defRPr sz="1600" b="1">
+                <a:solidFill>
+                  <a:srgbClr val="1F3552"/>
+                </a:solidFill>
+                <a:latin typeface="Aptos"/>
+              </a:defRPr>
+            </a:pPr>
+            <a:r>
+              <a:t>2. Assess</a:t>
+            </a:r>
+          </a:p>
+        </p:txBody>
+      </p:sp>
+      <p:sp>
+        <p:nvSpPr>
+          <p:cNvPr id="10" name="TextBox 9"/>
+          <p:cNvSpPr txBox="1"/>
+          <p:nvPr/>
+        </p:nvSpPr>
+        <p:spPr>
+          <a:xfrm>
+            <a:off x="3090672" y="2267712"/>
+            <a:ext cx="1783080" cy="1508760"/>
+          </a:xfrm>
+          <a:prstGeom prst="rect">
+            <a:avLst/>
+          </a:prstGeom>
+          <a:noFill/>
+        </p:spPr>
+        <p:txBody>
+          <a:bodyPr wrap="square" anchor="t">
+            <a:spAutoFit/>
+          </a:bodyPr>
+          <a:lstStyle/>
+          <a:p>
+            <a:pPr algn="l">
+              <a:defRPr sz="1100" b="0">
+                <a:solidFill>
+                  <a:srgbClr val="617892"/>
+                </a:solidFill>
+                <a:latin typeface="Aptos"/>
+              </a:defRPr>
+            </a:pPr>
+            <a:r>
+              <a:t>Backend computes quality metrics and overall score.</a:t>
+            </a:r>
+          </a:p>
+        </p:txBody>
+      </p:sp>
+      <p:cxnSp>
+        <p:nvCxnSpPr>
+          <p:cNvPr id="11" name="Connector 10"/>
+          <p:cNvCxnSpPr/>
+          <p:nvPr/>
+        </p:nvCxnSpPr>
+        <p:spPr>
+          <a:xfrm>
+            <a:off x="4983480" y="2788920"/>
+            <a:ext cx="182880" cy="0"/>
+          </a:xfrm>
+          <a:prstGeom prst="line">
+            <a:avLst/>
+          </a:prstGeom>
+          <a:ln w="25400">
+            <a:solidFill>
+              <a:srgbClr val="4C77A8"/>
+            </a:solidFill>
+          </a:ln>
+        </p:spPr>
+        <p:style>
+          <a:lnRef idx="2">
+            <a:schemeClr val="accent1"/>
+          </a:lnRef>
+          <a:fillRef idx="0">
+            <a:schemeClr val="accent1"/>
+          </a:fillRef>
+          <a:effectRef idx="1">
+            <a:schemeClr val="accent1"/>
+          </a:effectRef>
+          <a:fontRef idx="minor">
+            <a:schemeClr val="tx1"/>
+          </a:fontRef>
+        </p:style>
+      </p:cxnSp>
+      <p:sp>
+        <p:nvSpPr>
+          <p:cNvPr id="12" name="Rounded Rectangle 11"/>
+          <p:cNvSpPr/>
+          <p:nvPr/>
+        </p:nvSpPr>
+        <p:spPr>
+          <a:xfrm>
+            <a:off x="5166360" y="1828800"/>
+            <a:ext cx="2057400" cy="2011680"/>
+          </a:xfrm>
+          <a:prstGeom prst="roundRect">
+            <a:avLst/>
+          </a:prstGeom>
+          <a:solidFill>
+            <a:srgbClr val="EEF4FA"/>
+          </a:solidFill>
+          <a:ln w="12700">
+            <a:solidFill>
+              <a:srgbClr val="C8D5E3"/>
+            </a:solidFill>
+          </a:ln>
+        </p:spPr>
+        <p:style>
+          <a:lnRef idx="1">
+            <a:schemeClr val="accent1"/>
+          </a:lnRef>
+          <a:fillRef idx="3">
+            <a:schemeClr val="accent1"/>
+          </a:fillRef>
+          <a:effectRef idx="2">
+            <a:schemeClr val="accent1"/>
+          </a:effectRef>
+          <a:fontRef idx="minor">
+            <a:schemeClr val="lt1"/>
+          </a:fontRef>
+        </p:style>
+        <p:txBody>
+          <a:bodyPr rtlCol="0" anchor="ctr"/>
+          <a:lstStyle/>
+          <a:p>
+            <a:pPr algn="ctr"/>
+            <a:endParaRPr/>
+          </a:p>
+        </p:txBody>
+      </p:sp>
+      <p:sp>
+        <p:nvSpPr>
+          <p:cNvPr id="13" name="TextBox 12"/>
+          <p:cNvSpPr txBox="1"/>
+          <p:nvPr/>
+        </p:nvSpPr>
+        <p:spPr>
+          <a:xfrm>
+            <a:off x="5330952" y="1956816"/>
+            <a:ext cx="1783080" cy="256032"/>
+          </a:xfrm>
+          <a:prstGeom prst="rect">
+            <a:avLst/>
+          </a:prstGeom>
+          <a:noFill/>
+        </p:spPr>
+        <p:txBody>
+          <a:bodyPr wrap="square" anchor="t">
+            <a:spAutoFit/>
+          </a:bodyPr>
+          <a:lstStyle/>
+          <a:p>
+            <a:pPr algn="l">
+              <a:defRPr sz="1600" b="1">
+                <a:solidFill>
+                  <a:srgbClr val="1F3552"/>
+                </a:solidFill>
+                <a:latin typeface="Aptos"/>
+              </a:defRPr>
+            </a:pPr>
+            <a:r>
+              <a:t>3. Decide</a:t>
+            </a:r>
+          </a:p>
+        </p:txBody>
+      </p:sp>
+      <p:sp>
+        <p:nvSpPr>
+          <p:cNvPr id="14" name="TextBox 13"/>
+          <p:cNvSpPr txBox="1"/>
+          <p:nvPr/>
+        </p:nvSpPr>
+        <p:spPr>
+          <a:xfrm>
+            <a:off x="5330952" y="2267712"/>
+            <a:ext cx="1783080" cy="1508760"/>
+          </a:xfrm>
+          <a:prstGeom prst="rect">
+            <a:avLst/>
+          </a:prstGeom>
+          <a:noFill/>
+        </p:spPr>
+        <p:txBody>
+          <a:bodyPr wrap="square" anchor="t">
+            <a:spAutoFit/>
+          </a:bodyPr>
+          <a:lstStyle/>
+          <a:p>
+            <a:pPr algn="l">
+              <a:defRPr sz="1100" b="0">
+                <a:solidFill>
+                  <a:srgbClr val="617892"/>
+                </a:solidFill>
+                <a:latin typeface="Aptos"/>
+              </a:defRPr>
+            </a:pPr>
+            <a:r>
+              <a:t>If score &gt;= 90, preserve. Otherwise detect issues.</a:t>
+            </a:r>
+          </a:p>
+        </p:txBody>
+      </p:sp>
+      <p:cxnSp>
+        <p:nvCxnSpPr>
+          <p:cNvPr id="15" name="Connector 14"/>
+          <p:cNvCxnSpPr/>
+          <p:nvPr/>
+        </p:nvCxnSpPr>
+        <p:spPr>
+          <a:xfrm>
+            <a:off x="7223760" y="2788920"/>
+            <a:ext cx="182880" cy="0"/>
+          </a:xfrm>
+          <a:prstGeom prst="line">
+            <a:avLst/>
+          </a:prstGeom>
+          <a:ln w="25400">
+            <a:solidFill>
+              <a:srgbClr val="4C77A8"/>
+            </a:solidFill>
+          </a:ln>
+        </p:spPr>
+        <p:style>
+          <a:lnRef idx="2">
+            <a:schemeClr val="accent1"/>
+          </a:lnRef>
+          <a:fillRef idx="0">
+            <a:schemeClr val="accent1"/>
+          </a:fillRef>
+          <a:effectRef idx="1">
+            <a:schemeClr val="accent1"/>
+          </a:effectRef>
+          <a:fontRef idx="minor">
+            <a:schemeClr val="tx1"/>
+          </a:fontRef>
+        </p:style>
+      </p:cxnSp>
+      <p:sp>
+        <p:nvSpPr>
+          <p:cNvPr id="16" name="Rounded Rectangle 15"/>
+          <p:cNvSpPr/>
+          <p:nvPr/>
+        </p:nvSpPr>
+        <p:spPr>
+          <a:xfrm>
+            <a:off x="7406640" y="1828800"/>
+            <a:ext cx="2057400" cy="2011680"/>
+          </a:xfrm>
+          <a:prstGeom prst="roundRect">
+            <a:avLst/>
+          </a:prstGeom>
+          <a:solidFill>
+            <a:srgbClr val="FFFFFF"/>
+          </a:solidFill>
+          <a:ln w="12700">
+            <a:solidFill>
+              <a:srgbClr val="C8D5E3"/>
+            </a:solidFill>
+          </a:ln>
+        </p:spPr>
+        <p:style>
+          <a:lnRef idx="1">
+            <a:schemeClr val="accent1"/>
+          </a:lnRef>
+          <a:fillRef idx="3">
+            <a:schemeClr val="accent1"/>
+          </a:fillRef>
+          <a:effectRef idx="2">
+            <a:schemeClr val="accent1"/>
+          </a:effectRef>
+          <a:fontRef idx="minor">
+            <a:schemeClr val="lt1"/>
+          </a:fontRef>
+        </p:style>
+        <p:txBody>
+          <a:bodyPr rtlCol="0" anchor="ctr"/>
+          <a:lstStyle/>
+          <a:p>
+            <a:pPr algn="ctr"/>
+            <a:endParaRPr/>
+          </a:p>
+        </p:txBody>
+      </p:sp>
+      <p:sp>
+        <p:nvSpPr>
+          <p:cNvPr id="17" name="TextBox 16"/>
+          <p:cNvSpPr txBox="1"/>
+          <p:nvPr/>
+        </p:nvSpPr>
+        <p:spPr>
+          <a:xfrm>
+            <a:off x="7571232" y="1956816"/>
+            <a:ext cx="1783080" cy="256032"/>
+          </a:xfrm>
+          <a:prstGeom prst="rect">
+            <a:avLst/>
+          </a:prstGeom>
+          <a:noFill/>
+        </p:spPr>
+        <p:txBody>
+          <a:bodyPr wrap="square" anchor="t">
+            <a:spAutoFit/>
+          </a:bodyPr>
+          <a:lstStyle/>
+          <a:p>
+            <a:pPr algn="l">
+              <a:defRPr sz="1600" b="1">
+                <a:solidFill>
+                  <a:srgbClr val="1F3552"/>
+                </a:solidFill>
+                <a:latin typeface="Aptos"/>
+              </a:defRPr>
+            </a:pPr>
+            <a:r>
+              <a:t>4. Enhance</a:t>
+            </a:r>
+          </a:p>
+        </p:txBody>
+      </p:sp>
+      <p:sp>
+        <p:nvSpPr>
+          <p:cNvPr id="18" name="TextBox 17"/>
+          <p:cNvSpPr txBox="1"/>
+          <p:nvPr/>
+        </p:nvSpPr>
+        <p:spPr>
+          <a:xfrm>
+            <a:off x="7571232" y="2267712"/>
+            <a:ext cx="1783080" cy="1508760"/>
+          </a:xfrm>
+          <a:prstGeom prst="rect">
+            <a:avLst/>
+          </a:prstGeom>
+          <a:noFill/>
+        </p:spPr>
+        <p:txBody>
+          <a:bodyPr wrap="square" anchor="t">
+            <a:spAutoFit/>
+          </a:bodyPr>
+          <a:lstStyle/>
+          <a:p>
+            <a:pPr algn="l">
+              <a:defRPr sz="1100" b="0">
+                <a:solidFill>
+                  <a:srgbClr val="617892"/>
+                </a:solidFill>
+                <a:latin typeface="Aptos"/>
+              </a:defRPr>
+            </a:pPr>
+            <a:r>
+              <a:t>Run suitable OpenCV enhancement candidates.</a:t>
+            </a:r>
+          </a:p>
+        </p:txBody>
+      </p:sp>
+      <p:cxnSp>
+        <p:nvCxnSpPr>
+          <p:cNvPr id="19" name="Connector 18"/>
+          <p:cNvCxnSpPr/>
+          <p:nvPr/>
+        </p:nvCxnSpPr>
+        <p:spPr>
+          <a:xfrm>
+            <a:off x="9464040" y="2788920"/>
+            <a:ext cx="182880" cy="0"/>
+          </a:xfrm>
+          <a:prstGeom prst="line">
+            <a:avLst/>
+          </a:prstGeom>
+          <a:ln w="25400">
+            <a:solidFill>
+              <a:srgbClr val="4C77A8"/>
+            </a:solidFill>
+          </a:ln>
+        </p:spPr>
+        <p:style>
+          <a:lnRef idx="2">
+            <a:schemeClr val="accent1"/>
+          </a:lnRef>
+          <a:fillRef idx="0">
+            <a:schemeClr val="accent1"/>
+          </a:fillRef>
+          <a:effectRef idx="1">
+            <a:schemeClr val="accent1"/>
+          </a:effectRef>
+          <a:fontRef idx="minor">
+            <a:schemeClr val="tx1"/>
+          </a:fontRef>
+        </p:style>
+      </p:cxnSp>
+      <p:sp>
+        <p:nvSpPr>
+          <p:cNvPr id="20" name="Rounded Rectangle 19"/>
+          <p:cNvSpPr/>
+          <p:nvPr/>
+        </p:nvSpPr>
+        <p:spPr>
+          <a:xfrm>
+            <a:off x="9646920" y="1828800"/>
+            <a:ext cx="2057400" cy="2011680"/>
+          </a:xfrm>
+          <a:prstGeom prst="roundRect">
+            <a:avLst/>
+          </a:prstGeom>
+          <a:solidFill>
+            <a:srgbClr val="EEF4FA"/>
+          </a:solidFill>
+          <a:ln w="12700">
+            <a:solidFill>
+              <a:srgbClr val="C8D5E3"/>
+            </a:solidFill>
+          </a:ln>
+        </p:spPr>
+        <p:style>
+          <a:lnRef idx="1">
+            <a:schemeClr val="accent1"/>
+          </a:lnRef>
+          <a:fillRef idx="3">
+            <a:schemeClr val="accent1"/>
+          </a:fillRef>
+          <a:effectRef idx="2">
+            <a:schemeClr val="accent1"/>
+          </a:effectRef>
+          <a:fontRef idx="minor">
+            <a:schemeClr val="lt1"/>
+          </a:fontRef>
+        </p:style>
+        <p:txBody>
+          <a:bodyPr rtlCol="0" anchor="ctr"/>
+          <a:lstStyle/>
+          <a:p>
+            <a:pPr algn="ctr"/>
+            <a:endParaRPr/>
+          </a:p>
+        </p:txBody>
+      </p:sp>
+      <p:sp>
+        <p:nvSpPr>
+          <p:cNvPr id="21" name="TextBox 20"/>
+          <p:cNvSpPr txBox="1"/>
+          <p:nvPr/>
+        </p:nvSpPr>
+        <p:spPr>
+          <a:xfrm>
+            <a:off x="9811512" y="1956816"/>
+            <a:ext cx="1783080" cy="256032"/>
+          </a:xfrm>
+          <a:prstGeom prst="rect">
+            <a:avLst/>
+          </a:prstGeom>
+          <a:noFill/>
+        </p:spPr>
+        <p:txBody>
+          <a:bodyPr wrap="square" anchor="t">
+            <a:spAutoFit/>
+          </a:bodyPr>
+          <a:lstStyle/>
+          <a:p>
+            <a:pPr algn="l">
+              <a:defRPr sz="1600" b="1">
+                <a:solidFill>
+                  <a:srgbClr val="1F3552"/>
+                </a:solidFill>
+                <a:latin typeface="Aptos"/>
+              </a:defRPr>
+            </a:pPr>
+            <a:r>
+              <a:t>5. Compare</a:t>
+            </a:r>
+          </a:p>
+        </p:txBody>
+      </p:sp>
+      <p:sp>
+        <p:nvSpPr>
+          <p:cNvPr id="22" name="TextBox 21"/>
+          <p:cNvSpPr txBox="1"/>
+          <p:nvPr/>
+        </p:nvSpPr>
+        <p:spPr>
+          <a:xfrm>
+            <a:off x="9811512" y="2267712"/>
+            <a:ext cx="1783080" cy="1508760"/>
+          </a:xfrm>
+          <a:prstGeom prst="rect">
+            <a:avLst/>
+          </a:prstGeom>
+          <a:noFill/>
+        </p:spPr>
+        <p:txBody>
+          <a:bodyPr wrap="square" anchor="t">
+            <a:spAutoFit/>
+          </a:bodyPr>
+          <a:lstStyle/>
+          <a:p>
+            <a:pPr algn="l">
+              <a:defRPr sz="1100" b="0">
+                <a:solidFill>
+                  <a:srgbClr val="617892"/>
+                </a:solidFill>
+                <a:latin typeface="Aptos"/>
+              </a:defRPr>
+            </a:pPr>
+            <a:r>
+              <a:t>Return result, metrics, quality, and improvements.</a:t>
             </a:r>
           </a:p>
         </p:txBody>
@@ -3317,12 +4468,12 @@
 </file>
 
 <file path=ppt/slides/slide3.xml><?xml version="1.0" encoding="utf-8"?>
-<p:sld xmlns:a="http://schemas.openxmlformats.org/drawingml/2006/main" xmlns:p="http://schemas.openxmlformats.org/presentationml/2006/main" xmlns:r="http://schemas.openxmlformats.org/officeDocument/2006/relationships">
+<p:sld xmlns:a="http://schemas.openxmlformats.org/drawingml/2006/main" xmlns:r="http://schemas.openxmlformats.org/officeDocument/2006/relationships" xmlns:p="http://schemas.openxmlformats.org/presentationml/2006/main">
   <p:cSld>
     <p:bg>
       <p:bgPr>
         <a:solidFill>
-          <a:srgbClr val="F7FAFD"/>
+          <a:srgbClr val="FFFFFF"/>
         </a:solidFill>
         <a:effectLst/>
       </p:bgPr>
@@ -3333,7 +4484,14 @@
         <p:cNvGrpSpPr/>
         <p:nvPr/>
       </p:nvGrpSpPr>
-      <p:grpSpPr/>
+      <p:grpSpPr>
+        <a:xfrm>
+          <a:off x="0" y="0"/>
+          <a:ext cx="0" cy="0"/>
+          <a:chOff x="0" y="0"/>
+          <a:chExt cx="0" cy="0"/>
+        </a:xfrm>
+      </p:grpSpPr>
       <p:sp>
         <p:nvSpPr>
           <p:cNvPr id="2" name="TextBox 1"/>
@@ -3342,8 +4500,8 @@
         </p:nvSpPr>
         <p:spPr>
           <a:xfrm>
-            <a:off x="548640" y="365760"/>
-            <a:ext cx="7315200" cy="457200"/>
+            <a:off x="594360" y="320040"/>
+            <a:ext cx="4114800" cy="228600"/>
           </a:xfrm>
           <a:prstGeom prst="rect">
             <a:avLst/>
@@ -3351,45 +4509,81 @@
           <a:noFill/>
         </p:spPr>
         <p:txBody>
-          <a:bodyPr wrap="none">
+          <a:bodyPr wrap="square" anchor="t">
             <a:spAutoFit/>
           </a:bodyPr>
           <a:lstStyle/>
           <a:p>
-            <a:pPr>
+            <a:pPr algn="l">
+              <a:defRPr sz="1000" b="1">
+                <a:solidFill>
+                  <a:srgbClr val="4C77A8"/>
+                </a:solidFill>
+                <a:latin typeface="Aptos"/>
+              </a:defRPr>
+            </a:pPr>
+            <a:r>
+              <a:t>METRICS</a:t>
+            </a:r>
+          </a:p>
+        </p:txBody>
+      </p:sp>
+      <p:sp>
+        <p:nvSpPr>
+          <p:cNvPr id="3" name="TextBox 2"/>
+          <p:cNvSpPr txBox="1"/>
+          <p:nvPr/>
+        </p:nvSpPr>
+        <p:spPr>
+          <a:xfrm>
+            <a:off x="594360" y="576072"/>
+            <a:ext cx="9601200" cy="502920"/>
+          </a:xfrm>
+          <a:prstGeom prst="rect">
+            <a:avLst/>
+          </a:prstGeom>
+          <a:noFill/>
+        </p:spPr>
+        <p:txBody>
+          <a:bodyPr wrap="square" anchor="t">
+            <a:spAutoFit/>
+          </a:bodyPr>
+          <a:lstStyle/>
+          <a:p>
+            <a:pPr algn="l">
               <a:defRPr sz="2400" b="1">
                 <a:solidFill>
-                  <a:srgbClr val="203047"/>
+                  <a:srgbClr val="1F3552"/>
                 </a:solidFill>
                 <a:latin typeface="Aptos"/>
               </a:defRPr>
             </a:pPr>
             <a:r>
-              <a:t>System Architecture</a:t>
-            </a:r>
-          </a:p>
-        </p:txBody>
-      </p:sp>
-      <p:sp>
-        <p:nvSpPr>
-          <p:cNvPr id="3" name="Rounded Rectangle 2"/>
+              <a:t>How image quality is measured</a:t>
+            </a:r>
+          </a:p>
+        </p:txBody>
+      </p:sp>
+      <p:sp>
+        <p:nvSpPr>
+          <p:cNvPr id="4" name="Rounded Rectangle 3"/>
           <p:cNvSpPr/>
           <p:nvPr/>
         </p:nvSpPr>
         <p:spPr>
           <a:xfrm>
-            <a:off x="822960" y="1371600"/>
-            <a:ext cx="2926080" cy="2103120"/>
+            <a:off x="731520" y="1645920"/>
+            <a:ext cx="3246120" cy="1005840"/>
           </a:xfrm>
           <a:prstGeom prst="roundRect">
             <a:avLst/>
           </a:prstGeom>
           <a:solidFill>
-            <a:srgbClr val="EEF4F8"/>
+            <a:srgbClr val="EEF4FA"/>
           </a:solidFill>
-          <a:ln>
+          <a:ln w="12700">
             <a:solidFill>
-              <a:srgbClr val="C5D4E3"/>
+              <a:srgbClr val="C8D5E3"/>
             </a:solidFill>
           </a:ln>
         </p:spPr>
@@ -3412,19 +4606,20 @@
           <a:lstStyle/>
           <a:p>
             <a:pPr algn="ctr"/>
-          </a:p>
-        </p:txBody>
-      </p:sp>
-      <p:sp>
-        <p:nvSpPr>
-          <p:cNvPr id="4" name="TextBox 3"/>
+            <a:endParaRPr/>
+          </a:p>
+        </p:txBody>
+      </p:sp>
+      <p:sp>
+        <p:nvSpPr>
+          <p:cNvPr id="5" name="TextBox 4"/>
           <p:cNvSpPr txBox="1"/>
           <p:nvPr/>
         </p:nvSpPr>
         <p:spPr>
           <a:xfrm>
-            <a:off x="932688" y="1463040"/>
-            <a:ext cx="2743200" cy="219456"/>
+            <a:off x="896112" y="1773936"/>
+            <a:ext cx="2971800" cy="256032"/>
           </a:xfrm>
           <a:prstGeom prst="rect">
             <a:avLst/>
@@ -3432,35 +4627,35 @@
           <a:noFill/>
         </p:spPr>
         <p:txBody>
-          <a:bodyPr wrap="none">
+          <a:bodyPr wrap="square" anchor="t">
             <a:spAutoFit/>
           </a:bodyPr>
           <a:lstStyle/>
           <a:p>
-            <a:pPr>
-              <a:defRPr b="1" sz="1600">
-                <a:solidFill>
-                  <a:srgbClr val="203047"/>
+            <a:pPr algn="l">
+              <a:defRPr sz="1600" b="1">
+                <a:solidFill>
+                  <a:srgbClr val="1F3552"/>
                 </a:solidFill>
                 <a:latin typeface="Aptos"/>
               </a:defRPr>
             </a:pPr>
             <a:r>
-              <a:t>Frontend</a:t>
-            </a:r>
-          </a:p>
-        </p:txBody>
-      </p:sp>
-      <p:sp>
-        <p:nvSpPr>
-          <p:cNvPr id="5" name="TextBox 4"/>
+              <a:t>Brightness</a:t>
+            </a:r>
+          </a:p>
+        </p:txBody>
+      </p:sp>
+      <p:sp>
+        <p:nvSpPr>
+          <p:cNvPr id="6" name="TextBox 5"/>
           <p:cNvSpPr txBox="1"/>
           <p:nvPr/>
         </p:nvSpPr>
         <p:spPr>
           <a:xfrm>
-            <a:off x="932688" y="1737360"/>
-            <a:ext cx="2743200" cy="1691640"/>
+            <a:off x="896112" y="2084832"/>
+            <a:ext cx="2971800" cy="502920"/>
           </a:xfrm>
           <a:prstGeom prst="rect">
             <a:avLst/>
@@ -3468,53 +4663,45 @@
           <a:noFill/>
         </p:spPr>
         <p:txBody>
-          <a:bodyPr wrap="none">
+          <a:bodyPr wrap="square" anchor="t">
             <a:spAutoFit/>
           </a:bodyPr>
           <a:lstStyle/>
           <a:p>
-            <a:pPr>
-              <a:defRPr sz="1100">
-                <a:solidFill>
-                  <a:srgbClr val="5F7693"/>
+            <a:pPr algn="l">
+              <a:defRPr sz="1100" b="0">
+                <a:solidFill>
+                  <a:srgbClr val="617892"/>
                 </a:solidFill>
                 <a:latin typeface="Aptos"/>
               </a:defRPr>
             </a:pPr>
             <a:r>
-              <a:t>Next.js UI</a:t>
-            </a:r>
-            <a:br/>
-            <a:r>
-              <a:t>React + TypeScript</a:t>
-            </a:r>
-            <a:br/>
-            <a:r>
-              <a:t>Upload, preview, compare, download</a:t>
-            </a:r>
-          </a:p>
-        </p:txBody>
-      </p:sp>
-      <p:sp>
-        <p:nvSpPr>
-          <p:cNvPr id="6" name="Rounded Rectangle 5"/>
+              <a:t>Overall exposure level</a:t>
+            </a:r>
+          </a:p>
+        </p:txBody>
+      </p:sp>
+      <p:sp>
+        <p:nvSpPr>
+          <p:cNvPr id="7" name="Rounded Rectangle 6"/>
           <p:cNvSpPr/>
           <p:nvPr/>
         </p:nvSpPr>
         <p:spPr>
           <a:xfrm>
-            <a:off x="4572000" y="1371600"/>
-            <a:ext cx="3474720" cy="2103120"/>
+            <a:off x="4434840" y="1645920"/>
+            <a:ext cx="3246120" cy="1005840"/>
           </a:xfrm>
           <a:prstGeom prst="roundRect">
             <a:avLst/>
           </a:prstGeom>
           <a:solidFill>
-            <a:srgbClr val="EEF4F8"/>
+            <a:srgbClr val="EEF4FA"/>
           </a:solidFill>
-          <a:ln>
+          <a:ln w="12700">
             <a:solidFill>
-              <a:srgbClr val="C5D4E3"/>
+              <a:srgbClr val="C8D5E3"/>
             </a:solidFill>
           </a:ln>
         </p:spPr>
@@ -3537,19 +4724,20 @@
           <a:lstStyle/>
           <a:p>
             <a:pPr algn="ctr"/>
-          </a:p>
-        </p:txBody>
-      </p:sp>
-      <p:sp>
-        <p:nvSpPr>
-          <p:cNvPr id="7" name="TextBox 6"/>
+            <a:endParaRPr/>
+          </a:p>
+        </p:txBody>
+      </p:sp>
+      <p:sp>
+        <p:nvSpPr>
+          <p:cNvPr id="8" name="TextBox 7"/>
           <p:cNvSpPr txBox="1"/>
           <p:nvPr/>
         </p:nvSpPr>
         <p:spPr>
           <a:xfrm>
-            <a:off x="4681728" y="1463040"/>
-            <a:ext cx="3291840" cy="219456"/>
+            <a:off x="4599432" y="1773936"/>
+            <a:ext cx="2971800" cy="256032"/>
           </a:xfrm>
           <a:prstGeom prst="rect">
             <a:avLst/>
@@ -3557,35 +4745,35 @@
           <a:noFill/>
         </p:spPr>
         <p:txBody>
-          <a:bodyPr wrap="none">
+          <a:bodyPr wrap="square" anchor="t">
             <a:spAutoFit/>
           </a:bodyPr>
           <a:lstStyle/>
           <a:p>
-            <a:pPr>
-              <a:defRPr b="1" sz="1600">
-                <a:solidFill>
-                  <a:srgbClr val="203047"/>
+            <a:pPr algn="l">
+              <a:defRPr sz="1600" b="1">
+                <a:solidFill>
+                  <a:srgbClr val="1F3552"/>
                 </a:solidFill>
                 <a:latin typeface="Aptos"/>
               </a:defRPr>
             </a:pPr>
             <a:r>
-              <a:t>Backend</a:t>
-            </a:r>
-          </a:p>
-        </p:txBody>
-      </p:sp>
-      <p:sp>
-        <p:nvSpPr>
-          <p:cNvPr id="8" name="TextBox 7"/>
+              <a:t>Contrast</a:t>
+            </a:r>
+          </a:p>
+        </p:txBody>
+      </p:sp>
+      <p:sp>
+        <p:nvSpPr>
+          <p:cNvPr id="9" name="TextBox 8"/>
           <p:cNvSpPr txBox="1"/>
           <p:nvPr/>
         </p:nvSpPr>
         <p:spPr>
           <a:xfrm>
-            <a:off x="4681728" y="1737360"/>
-            <a:ext cx="3291840" cy="1691640"/>
+            <a:off x="4599432" y="2084832"/>
+            <a:ext cx="2971800" cy="502920"/>
           </a:xfrm>
           <a:prstGeom prst="rect">
             <a:avLst/>
@@ -3593,43 +4781,81 @@
           <a:noFill/>
         </p:spPr>
         <p:txBody>
-          <a:bodyPr wrap="none">
+          <a:bodyPr wrap="square" anchor="t">
             <a:spAutoFit/>
           </a:bodyPr>
           <a:lstStyle/>
           <a:p>
-            <a:pPr>
-              <a:defRPr sz="1100">
-                <a:solidFill>
-                  <a:srgbClr val="5F7693"/>
+            <a:pPr algn="l">
+              <a:defRPr sz="1100" b="0">
+                <a:solidFill>
+                  <a:srgbClr val="617892"/>
                 </a:solidFill>
                 <a:latin typeface="Aptos"/>
               </a:defRPr>
             </a:pPr>
             <a:r>
-              <a:t>Flask API</a:t>
-            </a:r>
-            <a:br/>
-            <a:r>
-              <a:t>OpenCV enhancement pipeline</a:t>
-            </a:r>
-            <a:br/>
-            <a:r>
-              <a:t>Quality scoring and decision logic</a:t>
-            </a:r>
-          </a:p>
-        </p:txBody>
-      </p:sp>
-      <p:sp>
-        <p:nvSpPr>
-          <p:cNvPr id="9" name="TextBox 8"/>
+              <a:t>Spread of grayscale intensity</a:t>
+            </a:r>
+          </a:p>
+        </p:txBody>
+      </p:sp>
+      <p:sp>
+        <p:nvSpPr>
+          <p:cNvPr id="10" name="Rounded Rectangle 9"/>
+          <p:cNvSpPr/>
+          <p:nvPr/>
+        </p:nvSpPr>
+        <p:spPr>
+          <a:xfrm>
+            <a:off x="8138160" y="1645920"/>
+            <a:ext cx="3246120" cy="1005840"/>
+          </a:xfrm>
+          <a:prstGeom prst="roundRect">
+            <a:avLst/>
+          </a:prstGeom>
+          <a:solidFill>
+            <a:srgbClr val="EEF4FA"/>
+          </a:solidFill>
+          <a:ln w="12700">
+            <a:solidFill>
+              <a:srgbClr val="C8D5E3"/>
+            </a:solidFill>
+          </a:ln>
+        </p:spPr>
+        <p:style>
+          <a:lnRef idx="1">
+            <a:schemeClr val="accent1"/>
+          </a:lnRef>
+          <a:fillRef idx="3">
+            <a:schemeClr val="accent1"/>
+          </a:fillRef>
+          <a:effectRef idx="2">
+            <a:schemeClr val="accent1"/>
+          </a:effectRef>
+          <a:fontRef idx="minor">
+            <a:schemeClr val="lt1"/>
+          </a:fontRef>
+        </p:style>
+        <p:txBody>
+          <a:bodyPr rtlCol="0" anchor="ctr"/>
+          <a:lstStyle/>
+          <a:p>
+            <a:pPr algn="ctr"/>
+            <a:endParaRPr/>
+          </a:p>
+        </p:txBody>
+      </p:sp>
+      <p:sp>
+        <p:nvSpPr>
+          <p:cNvPr id="11" name="TextBox 10"/>
           <p:cNvSpPr txBox="1"/>
           <p:nvPr/>
         </p:nvSpPr>
         <p:spPr>
           <a:xfrm>
-            <a:off x="3840480" y="2011680"/>
-            <a:ext cx="457200" cy="457200"/>
+            <a:off x="8302752" y="1773936"/>
+            <a:ext cx="2971800" cy="256032"/>
           </a:xfrm>
           <a:prstGeom prst="rect">
             <a:avLst/>
@@ -3637,20 +4863,529 @@
           <a:noFill/>
         </p:spPr>
         <p:txBody>
-          <a:bodyPr wrap="none">
+          <a:bodyPr wrap="square" anchor="t">
             <a:spAutoFit/>
           </a:bodyPr>
           <a:lstStyle/>
           <a:p>
-            <a:pPr algn="ctr">
-              <a:defRPr sz="2800" b="1">
-                <a:solidFill>
-                  <a:srgbClr val="7F9CBB"/>
-                </a:solidFill>
+            <a:pPr algn="l">
+              <a:defRPr sz="1600" b="1">
+                <a:solidFill>
+                  <a:srgbClr val="1F3552"/>
+                </a:solidFill>
+                <a:latin typeface="Aptos"/>
               </a:defRPr>
             </a:pPr>
             <a:r>
-              <a:t>→</a:t>
+              <a:t>Sharpness</a:t>
+            </a:r>
+          </a:p>
+        </p:txBody>
+      </p:sp>
+      <p:sp>
+        <p:nvSpPr>
+          <p:cNvPr id="12" name="TextBox 11"/>
+          <p:cNvSpPr txBox="1"/>
+          <p:nvPr/>
+        </p:nvSpPr>
+        <p:spPr>
+          <a:xfrm>
+            <a:off x="8302752" y="2084832"/>
+            <a:ext cx="2971800" cy="502920"/>
+          </a:xfrm>
+          <a:prstGeom prst="rect">
+            <a:avLst/>
+          </a:prstGeom>
+          <a:noFill/>
+        </p:spPr>
+        <p:txBody>
+          <a:bodyPr wrap="square" anchor="t">
+            <a:spAutoFit/>
+          </a:bodyPr>
+          <a:lstStyle/>
+          <a:p>
+            <a:pPr algn="l">
+              <a:defRPr sz="1100" b="0">
+                <a:solidFill>
+                  <a:srgbClr val="617892"/>
+                </a:solidFill>
+                <a:latin typeface="Aptos"/>
+              </a:defRPr>
+            </a:pPr>
+            <a:r>
+              <a:t>Laplacian variance for edge clarity</a:t>
+            </a:r>
+          </a:p>
+        </p:txBody>
+      </p:sp>
+      <p:sp>
+        <p:nvSpPr>
+          <p:cNvPr id="13" name="Rounded Rectangle 12"/>
+          <p:cNvSpPr/>
+          <p:nvPr/>
+        </p:nvSpPr>
+        <p:spPr>
+          <a:xfrm>
+            <a:off x="731520" y="3063240"/>
+            <a:ext cx="3246120" cy="1005840"/>
+          </a:xfrm>
+          <a:prstGeom prst="roundRect">
+            <a:avLst/>
+          </a:prstGeom>
+          <a:solidFill>
+            <a:srgbClr val="FFFFFF"/>
+          </a:solidFill>
+          <a:ln w="12700">
+            <a:solidFill>
+              <a:srgbClr val="C8D5E3"/>
+            </a:solidFill>
+          </a:ln>
+        </p:spPr>
+        <p:style>
+          <a:lnRef idx="1">
+            <a:schemeClr val="accent1"/>
+          </a:lnRef>
+          <a:fillRef idx="3">
+            <a:schemeClr val="accent1"/>
+          </a:fillRef>
+          <a:effectRef idx="2">
+            <a:schemeClr val="accent1"/>
+          </a:effectRef>
+          <a:fontRef idx="minor">
+            <a:schemeClr val="lt1"/>
+          </a:fontRef>
+        </p:style>
+        <p:txBody>
+          <a:bodyPr rtlCol="0" anchor="ctr"/>
+          <a:lstStyle/>
+          <a:p>
+            <a:pPr algn="ctr"/>
+            <a:endParaRPr/>
+          </a:p>
+        </p:txBody>
+      </p:sp>
+      <p:sp>
+        <p:nvSpPr>
+          <p:cNvPr id="14" name="TextBox 13"/>
+          <p:cNvSpPr txBox="1"/>
+          <p:nvPr/>
+        </p:nvSpPr>
+        <p:spPr>
+          <a:xfrm>
+            <a:off x="896112" y="3191256"/>
+            <a:ext cx="2971800" cy="256032"/>
+          </a:xfrm>
+          <a:prstGeom prst="rect">
+            <a:avLst/>
+          </a:prstGeom>
+          <a:noFill/>
+        </p:spPr>
+        <p:txBody>
+          <a:bodyPr wrap="square" anchor="t">
+            <a:spAutoFit/>
+          </a:bodyPr>
+          <a:lstStyle/>
+          <a:p>
+            <a:pPr algn="l">
+              <a:defRPr sz="1600" b="1">
+                <a:solidFill>
+                  <a:srgbClr val="1F3552"/>
+                </a:solidFill>
+                <a:latin typeface="Aptos"/>
+              </a:defRPr>
+            </a:pPr>
+            <a:r>
+              <a:t>Noise</a:t>
+            </a:r>
+          </a:p>
+        </p:txBody>
+      </p:sp>
+      <p:sp>
+        <p:nvSpPr>
+          <p:cNvPr id="15" name="TextBox 14"/>
+          <p:cNvSpPr txBox="1"/>
+          <p:nvPr/>
+        </p:nvSpPr>
+        <p:spPr>
+          <a:xfrm>
+            <a:off x="896112" y="3502152"/>
+            <a:ext cx="2971800" cy="502920"/>
+          </a:xfrm>
+          <a:prstGeom prst="rect">
+            <a:avLst/>
+          </a:prstGeom>
+          <a:noFill/>
+        </p:spPr>
+        <p:txBody>
+          <a:bodyPr wrap="square" anchor="t">
+            <a:spAutoFit/>
+          </a:bodyPr>
+          <a:lstStyle/>
+          <a:p>
+            <a:pPr algn="l">
+              <a:defRPr sz="1100" b="0">
+                <a:solidFill>
+                  <a:srgbClr val="617892"/>
+                </a:solidFill>
+                <a:latin typeface="Aptos"/>
+              </a:defRPr>
+            </a:pPr>
+            <a:r>
+              <a:t>Residual after smoothing</a:t>
+            </a:r>
+          </a:p>
+        </p:txBody>
+      </p:sp>
+      <p:sp>
+        <p:nvSpPr>
+          <p:cNvPr id="16" name="Rounded Rectangle 15"/>
+          <p:cNvSpPr/>
+          <p:nvPr/>
+        </p:nvSpPr>
+        <p:spPr>
+          <a:xfrm>
+            <a:off x="4434840" y="3063240"/>
+            <a:ext cx="3246120" cy="1005840"/>
+          </a:xfrm>
+          <a:prstGeom prst="roundRect">
+            <a:avLst/>
+          </a:prstGeom>
+          <a:solidFill>
+            <a:srgbClr val="FFFFFF"/>
+          </a:solidFill>
+          <a:ln w="12700">
+            <a:solidFill>
+              <a:srgbClr val="C8D5E3"/>
+            </a:solidFill>
+          </a:ln>
+        </p:spPr>
+        <p:style>
+          <a:lnRef idx="1">
+            <a:schemeClr val="accent1"/>
+          </a:lnRef>
+          <a:fillRef idx="3">
+            <a:schemeClr val="accent1"/>
+          </a:fillRef>
+          <a:effectRef idx="2">
+            <a:schemeClr val="accent1"/>
+          </a:effectRef>
+          <a:fontRef idx="minor">
+            <a:schemeClr val="lt1"/>
+          </a:fontRef>
+        </p:style>
+        <p:txBody>
+          <a:bodyPr rtlCol="0" anchor="ctr"/>
+          <a:lstStyle/>
+          <a:p>
+            <a:pPr algn="ctr"/>
+            <a:endParaRPr/>
+          </a:p>
+        </p:txBody>
+      </p:sp>
+      <p:sp>
+        <p:nvSpPr>
+          <p:cNvPr id="17" name="TextBox 16"/>
+          <p:cNvSpPr txBox="1"/>
+          <p:nvPr/>
+        </p:nvSpPr>
+        <p:spPr>
+          <a:xfrm>
+            <a:off x="4599432" y="3191256"/>
+            <a:ext cx="2971800" cy="256032"/>
+          </a:xfrm>
+          <a:prstGeom prst="rect">
+            <a:avLst/>
+          </a:prstGeom>
+          <a:noFill/>
+        </p:spPr>
+        <p:txBody>
+          <a:bodyPr wrap="square" anchor="t">
+            <a:spAutoFit/>
+          </a:bodyPr>
+          <a:lstStyle/>
+          <a:p>
+            <a:pPr algn="l">
+              <a:defRPr sz="1600" b="1">
+                <a:solidFill>
+                  <a:srgbClr val="1F3552"/>
+                </a:solidFill>
+                <a:latin typeface="Aptos"/>
+              </a:defRPr>
+            </a:pPr>
+            <a:r>
+              <a:t>Dynamic Range</a:t>
+            </a:r>
+          </a:p>
+        </p:txBody>
+      </p:sp>
+      <p:sp>
+        <p:nvSpPr>
+          <p:cNvPr id="18" name="TextBox 17"/>
+          <p:cNvSpPr txBox="1"/>
+          <p:nvPr/>
+        </p:nvSpPr>
+        <p:spPr>
+          <a:xfrm>
+            <a:off x="4599432" y="3502152"/>
+            <a:ext cx="2971800" cy="502920"/>
+          </a:xfrm>
+          <a:prstGeom prst="rect">
+            <a:avLst/>
+          </a:prstGeom>
+          <a:noFill/>
+        </p:spPr>
+        <p:txBody>
+          <a:bodyPr wrap="square" anchor="t">
+            <a:spAutoFit/>
+          </a:bodyPr>
+          <a:lstStyle/>
+          <a:p>
+            <a:pPr algn="l">
+              <a:defRPr sz="1100" b="0">
+                <a:solidFill>
+                  <a:srgbClr val="617892"/>
+                </a:solidFill>
+                <a:latin typeface="Aptos"/>
+              </a:defRPr>
+            </a:pPr>
+            <a:r>
+              <a:t>95th - 5th percentile intensity</a:t>
+            </a:r>
+          </a:p>
+        </p:txBody>
+      </p:sp>
+      <p:sp>
+        <p:nvSpPr>
+          <p:cNvPr id="19" name="Rounded Rectangle 18"/>
+          <p:cNvSpPr/>
+          <p:nvPr/>
+        </p:nvSpPr>
+        <p:spPr>
+          <a:xfrm>
+            <a:off x="8138160" y="3063240"/>
+            <a:ext cx="3246120" cy="1005840"/>
+          </a:xfrm>
+          <a:prstGeom prst="roundRect">
+            <a:avLst/>
+          </a:prstGeom>
+          <a:solidFill>
+            <a:srgbClr val="FFFFFF"/>
+          </a:solidFill>
+          <a:ln w="12700">
+            <a:solidFill>
+              <a:srgbClr val="C8D5E3"/>
+            </a:solidFill>
+          </a:ln>
+        </p:spPr>
+        <p:style>
+          <a:lnRef idx="1">
+            <a:schemeClr val="accent1"/>
+          </a:lnRef>
+          <a:fillRef idx="3">
+            <a:schemeClr val="accent1"/>
+          </a:fillRef>
+          <a:effectRef idx="2">
+            <a:schemeClr val="accent1"/>
+          </a:effectRef>
+          <a:fontRef idx="minor">
+            <a:schemeClr val="lt1"/>
+          </a:fontRef>
+        </p:style>
+        <p:txBody>
+          <a:bodyPr rtlCol="0" anchor="ctr"/>
+          <a:lstStyle/>
+          <a:p>
+            <a:pPr algn="ctr"/>
+            <a:endParaRPr/>
+          </a:p>
+        </p:txBody>
+      </p:sp>
+      <p:sp>
+        <p:nvSpPr>
+          <p:cNvPr id="20" name="TextBox 19"/>
+          <p:cNvSpPr txBox="1"/>
+          <p:nvPr/>
+        </p:nvSpPr>
+        <p:spPr>
+          <a:xfrm>
+            <a:off x="8302752" y="3191256"/>
+            <a:ext cx="2971800" cy="256032"/>
+          </a:xfrm>
+          <a:prstGeom prst="rect">
+            <a:avLst/>
+          </a:prstGeom>
+          <a:noFill/>
+        </p:spPr>
+        <p:txBody>
+          <a:bodyPr wrap="square" anchor="t">
+            <a:spAutoFit/>
+          </a:bodyPr>
+          <a:lstStyle/>
+          <a:p>
+            <a:pPr algn="l">
+              <a:defRPr sz="1600" b="1">
+                <a:solidFill>
+                  <a:srgbClr val="1F3552"/>
+                </a:solidFill>
+                <a:latin typeface="Aptos"/>
+              </a:defRPr>
+            </a:pPr>
+            <a:r>
+              <a:t>Colorfulness</a:t>
+            </a:r>
+          </a:p>
+        </p:txBody>
+      </p:sp>
+      <p:sp>
+        <p:nvSpPr>
+          <p:cNvPr id="21" name="TextBox 20"/>
+          <p:cNvSpPr txBox="1"/>
+          <p:nvPr/>
+        </p:nvSpPr>
+        <p:spPr>
+          <a:xfrm>
+            <a:off x="8302752" y="3502152"/>
+            <a:ext cx="2971800" cy="502920"/>
+          </a:xfrm>
+          <a:prstGeom prst="rect">
+            <a:avLst/>
+          </a:prstGeom>
+          <a:noFill/>
+        </p:spPr>
+        <p:txBody>
+          <a:bodyPr wrap="square" anchor="t">
+            <a:spAutoFit/>
+          </a:bodyPr>
+          <a:lstStyle/>
+          <a:p>
+            <a:pPr algn="l">
+              <a:defRPr sz="1100" b="0">
+                <a:solidFill>
+                  <a:srgbClr val="617892"/>
+                </a:solidFill>
+                <a:latin typeface="Aptos"/>
+              </a:defRPr>
+            </a:pPr>
+            <a:r>
+              <a:t>Vividness of color distribution</a:t>
+            </a:r>
+          </a:p>
+        </p:txBody>
+      </p:sp>
+      <p:sp>
+        <p:nvSpPr>
+          <p:cNvPr id="22" name="Rounded Rectangle 21"/>
+          <p:cNvSpPr/>
+          <p:nvPr/>
+        </p:nvSpPr>
+        <p:spPr>
+          <a:xfrm>
+            <a:off x="731520" y="4709160"/>
+            <a:ext cx="10698480" cy="1051560"/>
+          </a:xfrm>
+          <a:prstGeom prst="roundRect">
+            <a:avLst/>
+          </a:prstGeom>
+          <a:solidFill>
+            <a:srgbClr val="DCE8F5"/>
+          </a:solidFill>
+          <a:ln w="12700">
+            <a:solidFill>
+              <a:srgbClr val="C8D5E3"/>
+            </a:solidFill>
+          </a:ln>
+        </p:spPr>
+        <p:style>
+          <a:lnRef idx="1">
+            <a:schemeClr val="accent1"/>
+          </a:lnRef>
+          <a:fillRef idx="3">
+            <a:schemeClr val="accent1"/>
+          </a:fillRef>
+          <a:effectRef idx="2">
+            <a:schemeClr val="accent1"/>
+          </a:effectRef>
+          <a:fontRef idx="minor">
+            <a:schemeClr val="lt1"/>
+          </a:fontRef>
+        </p:style>
+        <p:txBody>
+          <a:bodyPr rtlCol="0" anchor="ctr"/>
+          <a:lstStyle/>
+          <a:p>
+            <a:pPr algn="ctr"/>
+            <a:endParaRPr/>
+          </a:p>
+        </p:txBody>
+      </p:sp>
+      <p:sp>
+        <p:nvSpPr>
+          <p:cNvPr id="23" name="TextBox 22"/>
+          <p:cNvSpPr txBox="1"/>
+          <p:nvPr/>
+        </p:nvSpPr>
+        <p:spPr>
+          <a:xfrm>
+            <a:off x="896112" y="4837176"/>
+            <a:ext cx="10424160" cy="256032"/>
+          </a:xfrm>
+          <a:prstGeom prst="rect">
+            <a:avLst/>
+          </a:prstGeom>
+          <a:noFill/>
+        </p:spPr>
+        <p:txBody>
+          <a:bodyPr wrap="square" anchor="t">
+            <a:spAutoFit/>
+          </a:bodyPr>
+          <a:lstStyle/>
+          <a:p>
+            <a:pPr algn="l">
+              <a:defRPr sz="1600" b="1">
+                <a:solidFill>
+                  <a:srgbClr val="1F3552"/>
+                </a:solidFill>
+                <a:latin typeface="Aptos"/>
+              </a:defRPr>
+            </a:pPr>
+            <a:r>
+              <a:t>Overall quality score</a:t>
+            </a:r>
+          </a:p>
+        </p:txBody>
+      </p:sp>
+      <p:sp>
+        <p:nvSpPr>
+          <p:cNvPr id="24" name="TextBox 23"/>
+          <p:cNvSpPr txBox="1"/>
+          <p:nvPr/>
+        </p:nvSpPr>
+        <p:spPr>
+          <a:xfrm>
+            <a:off x="896112" y="5148072"/>
+            <a:ext cx="10424160" cy="548640"/>
+          </a:xfrm>
+          <a:prstGeom prst="rect">
+            <a:avLst/>
+          </a:prstGeom>
+          <a:noFill/>
+        </p:spPr>
+        <p:txBody>
+          <a:bodyPr wrap="square" anchor="t">
+            <a:spAutoFit/>
+          </a:bodyPr>
+          <a:lstStyle/>
+          <a:p>
+            <a:pPr algn="l">
+              <a:defRPr sz="1100" b="0">
+                <a:solidFill>
+                  <a:srgbClr val="617892"/>
+                </a:solidFill>
+                <a:latin typeface="Aptos"/>
+              </a:defRPr>
+            </a:pPr>
+            <a:r>
+              <a:t>The individual metrics are converted into a single 0-100 score and mapped to a rating band: Excellent, Very Good, Good, Fair, or Needs Improvement.</a:t>
             </a:r>
           </a:p>
         </p:txBody>
@@ -3664,12 +5399,12 @@
 </file>
 
 <file path=ppt/slides/slide4.xml><?xml version="1.0" encoding="utf-8"?>
-<p:sld xmlns:a="http://schemas.openxmlformats.org/drawingml/2006/main" xmlns:p="http://schemas.openxmlformats.org/presentationml/2006/main" xmlns:r="http://schemas.openxmlformats.org/officeDocument/2006/relationships">
+<p:sld xmlns:a="http://schemas.openxmlformats.org/drawingml/2006/main" xmlns:r="http://schemas.openxmlformats.org/officeDocument/2006/relationships" xmlns:p="http://schemas.openxmlformats.org/presentationml/2006/main">
   <p:cSld>
     <p:bg>
       <p:bgPr>
         <a:solidFill>
-          <a:srgbClr val="F7FAFD"/>
+          <a:srgbClr val="FFFFFF"/>
         </a:solidFill>
         <a:effectLst/>
       </p:bgPr>
@@ -3680,7 +5415,14 @@
         <p:cNvGrpSpPr/>
         <p:nvPr/>
       </p:nvGrpSpPr>
-      <p:grpSpPr/>
+      <p:grpSpPr>
+        <a:xfrm>
+          <a:off x="0" y="0"/>
+          <a:ext cx="0" cy="0"/>
+          <a:chOff x="0" y="0"/>
+          <a:chExt cx="0" cy="0"/>
+        </a:xfrm>
+      </p:grpSpPr>
       <p:sp>
         <p:nvSpPr>
           <p:cNvPr id="2" name="TextBox 1"/>
@@ -3689,8 +5431,8 @@
         </p:nvSpPr>
         <p:spPr>
           <a:xfrm>
-            <a:off x="548640" y="365760"/>
-            <a:ext cx="7315200" cy="457200"/>
+            <a:off x="594360" y="320040"/>
+            <a:ext cx="4114800" cy="228600"/>
           </a:xfrm>
           <a:prstGeom prst="rect">
             <a:avLst/>
@@ -3698,45 +5440,81 @@
           <a:noFill/>
         </p:spPr>
         <p:txBody>
-          <a:bodyPr wrap="none">
+          <a:bodyPr wrap="square" anchor="t">
             <a:spAutoFit/>
           </a:bodyPr>
           <a:lstStyle/>
           <a:p>
-            <a:pPr>
+            <a:pPr algn="l">
+              <a:defRPr sz="1000" b="1">
+                <a:solidFill>
+                  <a:srgbClr val="4C77A8"/>
+                </a:solidFill>
+                <a:latin typeface="Aptos"/>
+              </a:defRPr>
+            </a:pPr>
+            <a:r>
+              <a:t>PIPELINE</a:t>
+            </a:r>
+          </a:p>
+        </p:txBody>
+      </p:sp>
+      <p:sp>
+        <p:nvSpPr>
+          <p:cNvPr id="3" name="TextBox 2"/>
+          <p:cNvSpPr txBox="1"/>
+          <p:nvPr/>
+        </p:nvSpPr>
+        <p:spPr>
+          <a:xfrm>
+            <a:off x="594360" y="576072"/>
+            <a:ext cx="9601200" cy="502920"/>
+          </a:xfrm>
+          <a:prstGeom prst="rect">
+            <a:avLst/>
+          </a:prstGeom>
+          <a:noFill/>
+        </p:spPr>
+        <p:txBody>
+          <a:bodyPr wrap="square" anchor="t">
+            <a:spAutoFit/>
+          </a:bodyPr>
+          <a:lstStyle/>
+          <a:p>
+            <a:pPr algn="l">
               <a:defRPr sz="2400" b="1">
                 <a:solidFill>
-                  <a:srgbClr val="203047"/>
+                  <a:srgbClr val="1F3552"/>
                 </a:solidFill>
                 <a:latin typeface="Aptos"/>
               </a:defRPr>
             </a:pPr>
             <a:r>
-              <a:t>Metrics Used for Assessment</a:t>
-            </a:r>
-          </a:p>
-        </p:txBody>
-      </p:sp>
-      <p:sp>
-        <p:nvSpPr>
-          <p:cNvPr id="3" name="Rounded Rectangle 2"/>
+              <a:t>OpenCV enhancement stages</a:t>
+            </a:r>
+          </a:p>
+        </p:txBody>
+      </p:sp>
+      <p:sp>
+        <p:nvSpPr>
+          <p:cNvPr id="4" name="Rounded Rectangle 3"/>
           <p:cNvSpPr/>
           <p:nvPr/>
         </p:nvSpPr>
         <p:spPr>
           <a:xfrm>
-            <a:off x="731520" y="1188720"/>
-            <a:ext cx="3429000" cy="914400"/>
+            <a:off x="685800" y="2240280"/>
+            <a:ext cx="1600200" cy="1234440"/>
           </a:xfrm>
           <a:prstGeom prst="roundRect">
             <a:avLst/>
           </a:prstGeom>
           <a:solidFill>
-            <a:srgbClr val="EEF4F8"/>
+            <a:srgbClr val="EEF4FA"/>
           </a:solidFill>
           <a:ln>
             <a:solidFill>
-              <a:srgbClr val="C5D4E3"/>
+              <a:srgbClr val="C8D5E3"/>
             </a:solidFill>
           </a:ln>
         </p:spPr>
@@ -3759,19 +5537,20 @@
           <a:lstStyle/>
           <a:p>
             <a:pPr algn="ctr"/>
-          </a:p>
-        </p:txBody>
-      </p:sp>
-      <p:sp>
-        <p:nvSpPr>
-          <p:cNvPr id="4" name="TextBox 3"/>
+            <a:endParaRPr/>
+          </a:p>
+        </p:txBody>
+      </p:sp>
+      <p:sp>
+        <p:nvSpPr>
+          <p:cNvPr id="5" name="TextBox 4"/>
           <p:cNvSpPr txBox="1"/>
           <p:nvPr/>
         </p:nvSpPr>
         <p:spPr>
           <a:xfrm>
-            <a:off x="841248" y="1280160"/>
-            <a:ext cx="3246120" cy="219456"/>
+            <a:off x="795528" y="2514600"/>
+            <a:ext cx="1371600" cy="640080"/>
           </a:xfrm>
           <a:prstGeom prst="rect">
             <a:avLst/>
@@ -3779,81 +5558,84 @@
           <a:noFill/>
         </p:spPr>
         <p:txBody>
-          <a:bodyPr wrap="none">
+          <a:bodyPr wrap="square" anchor="t">
             <a:spAutoFit/>
           </a:bodyPr>
           <a:lstStyle/>
           <a:p>
-            <a:pPr>
-              <a:defRPr b="1" sz="1600">
-                <a:solidFill>
-                  <a:srgbClr val="203047"/>
+            <a:pPr algn="ctr">
+              <a:defRPr sz="1300" b="1">
+                <a:solidFill>
+                  <a:srgbClr val="1F3552"/>
                 </a:solidFill>
                 <a:latin typeface="Aptos"/>
               </a:defRPr>
             </a:pPr>
             <a:r>
-              <a:t>Brightness</a:t>
-            </a:r>
-          </a:p>
-        </p:txBody>
-      </p:sp>
-      <p:sp>
-        <p:nvSpPr>
-          <p:cNvPr id="5" name="TextBox 4"/>
-          <p:cNvSpPr txBox="1"/>
-          <p:nvPr/>
-        </p:nvSpPr>
-        <p:spPr>
-          <a:xfrm>
-            <a:off x="841248" y="1554480"/>
-            <a:ext cx="3246120" cy="502920"/>
-          </a:xfrm>
-          <a:prstGeom prst="rect">
-            <a:avLst/>
-          </a:prstGeom>
-          <a:noFill/>
-        </p:spPr>
-        <p:txBody>
-          <a:bodyPr wrap="none">
-            <a:spAutoFit/>
-          </a:bodyPr>
-          <a:lstStyle/>
-          <a:p>
-            <a:pPr>
-              <a:defRPr sz="1100">
-                <a:solidFill>
-                  <a:srgbClr val="5F7693"/>
-                </a:solidFill>
-                <a:latin typeface="Aptos"/>
-              </a:defRPr>
-            </a:pPr>
-            <a:r>
-              <a:t>Measures overall exposure</a:t>
-            </a:r>
-          </a:p>
-        </p:txBody>
-      </p:sp>
-      <p:sp>
-        <p:nvSpPr>
-          <p:cNvPr id="6" name="Rounded Rectangle 5"/>
+              <a:t>Gray-world</a:t>
+            </a:r>
+            <a:br/>
+            <a:r>
+              <a:t>white balance</a:t>
+            </a:r>
+          </a:p>
+        </p:txBody>
+      </p:sp>
+      <p:cxnSp>
+        <p:nvCxnSpPr>
+          <p:cNvPr id="6" name="Connector 5"/>
+          <p:cNvCxnSpPr/>
+          <p:nvPr/>
+        </p:nvCxnSpPr>
+        <p:spPr>
+          <a:xfrm>
+            <a:off x="2286000" y="2852928"/>
+            <a:ext cx="228600" cy="0"/>
+          </a:xfrm>
+          <a:prstGeom prst="line">
+            <a:avLst/>
+          </a:prstGeom>
+          <a:ln w="25400">
+            <a:solidFill>
+              <a:srgbClr val="4C77A8"/>
+            </a:solidFill>
+          </a:ln>
+        </p:spPr>
+        <p:style>
+          <a:lnRef idx="2">
+            <a:schemeClr val="accent1"/>
+          </a:lnRef>
+          <a:fillRef idx="0">
+            <a:schemeClr val="accent1"/>
+          </a:fillRef>
+          <a:effectRef idx="1">
+            <a:schemeClr val="accent1"/>
+          </a:effectRef>
+          <a:fontRef idx="minor">
+            <a:schemeClr val="tx1"/>
+          </a:fontRef>
+        </p:style>
+      </p:cxnSp>
+      <p:sp>
+        <p:nvSpPr>
+          <p:cNvPr id="7" name="Rounded Rectangle 6"/>
           <p:cNvSpPr/>
           <p:nvPr/>
         </p:nvSpPr>
         <p:spPr>
           <a:xfrm>
-            <a:off x="4709159" y="1188720"/>
-            <a:ext cx="3429000" cy="914400"/>
+            <a:off x="2560320" y="2240280"/>
+            <a:ext cx="1600200" cy="1234440"/>
           </a:xfrm>
           <a:prstGeom prst="roundRect">
             <a:avLst/>
           </a:prstGeom>
           <a:solidFill>
-            <a:srgbClr val="EEF4F8"/>
+            <a:srgbClr val="FFFFFF"/>
           </a:solidFill>
           <a:ln>
             <a:solidFill>
-              <a:srgbClr val="C5D4E3"/>
+              <a:srgbClr val="C8D5E3"/>
             </a:solidFill>
           </a:ln>
         </p:spPr>
@@ -3876,19 +5658,20 @@
           <a:lstStyle/>
           <a:p>
             <a:pPr algn="ctr"/>
-          </a:p>
-        </p:txBody>
-      </p:sp>
-      <p:sp>
-        <p:nvSpPr>
-          <p:cNvPr id="7" name="TextBox 6"/>
+            <a:endParaRPr/>
+          </a:p>
+        </p:txBody>
+      </p:sp>
+      <p:sp>
+        <p:nvSpPr>
+          <p:cNvPr id="8" name="TextBox 7"/>
           <p:cNvSpPr txBox="1"/>
           <p:nvPr/>
         </p:nvSpPr>
         <p:spPr>
           <a:xfrm>
-            <a:off x="4818887" y="1280160"/>
-            <a:ext cx="3246120" cy="219456"/>
+            <a:off x="2670048" y="2514600"/>
+            <a:ext cx="1371600" cy="640080"/>
           </a:xfrm>
           <a:prstGeom prst="rect">
             <a:avLst/>
@@ -3896,81 +5679,84 @@
           <a:noFill/>
         </p:spPr>
         <p:txBody>
-          <a:bodyPr wrap="none">
+          <a:bodyPr wrap="square" anchor="t">
             <a:spAutoFit/>
           </a:bodyPr>
           <a:lstStyle/>
           <a:p>
-            <a:pPr>
-              <a:defRPr b="1" sz="1600">
-                <a:solidFill>
-                  <a:srgbClr val="203047"/>
+            <a:pPr algn="ctr">
+              <a:defRPr sz="1300" b="1">
+                <a:solidFill>
+                  <a:srgbClr val="1F3552"/>
                 </a:solidFill>
                 <a:latin typeface="Aptos"/>
               </a:defRPr>
             </a:pPr>
             <a:r>
-              <a:t>Contrast</a:t>
-            </a:r>
-          </a:p>
-        </p:txBody>
-      </p:sp>
-      <p:sp>
-        <p:nvSpPr>
-          <p:cNvPr id="8" name="TextBox 7"/>
-          <p:cNvSpPr txBox="1"/>
-          <p:nvPr/>
-        </p:nvSpPr>
-        <p:spPr>
-          <a:xfrm>
-            <a:off x="4818887" y="1554480"/>
-            <a:ext cx="3246120" cy="502920"/>
-          </a:xfrm>
-          <a:prstGeom prst="rect">
-            <a:avLst/>
-          </a:prstGeom>
-          <a:noFill/>
-        </p:spPr>
-        <p:txBody>
-          <a:bodyPr wrap="none">
-            <a:spAutoFit/>
-          </a:bodyPr>
-          <a:lstStyle/>
-          <a:p>
-            <a:pPr>
-              <a:defRPr sz="1100">
-                <a:solidFill>
-                  <a:srgbClr val="5F7693"/>
-                </a:solidFill>
-                <a:latin typeface="Aptos"/>
-              </a:defRPr>
-            </a:pPr>
-            <a:r>
-              <a:t>Measures spread of grayscale values</a:t>
-            </a:r>
-          </a:p>
-        </p:txBody>
-      </p:sp>
-      <p:sp>
-        <p:nvSpPr>
-          <p:cNvPr id="9" name="Rounded Rectangle 8"/>
+              <a:t>Adaptive</a:t>
+            </a:r>
+            <a:br/>
+            <a:r>
+              <a:t>gamma correction</a:t>
+            </a:r>
+          </a:p>
+        </p:txBody>
+      </p:sp>
+      <p:cxnSp>
+        <p:nvCxnSpPr>
+          <p:cNvPr id="9" name="Connector 8"/>
+          <p:cNvCxnSpPr/>
+          <p:nvPr/>
+        </p:nvCxnSpPr>
+        <p:spPr>
+          <a:xfrm>
+            <a:off x="4160520" y="2852928"/>
+            <a:ext cx="228600" cy="0"/>
+          </a:xfrm>
+          <a:prstGeom prst="line">
+            <a:avLst/>
+          </a:prstGeom>
+          <a:ln w="25400">
+            <a:solidFill>
+              <a:srgbClr val="4C77A8"/>
+            </a:solidFill>
+          </a:ln>
+        </p:spPr>
+        <p:style>
+          <a:lnRef idx="2">
+            <a:schemeClr val="accent1"/>
+          </a:lnRef>
+          <a:fillRef idx="0">
+            <a:schemeClr val="accent1"/>
+          </a:fillRef>
+          <a:effectRef idx="1">
+            <a:schemeClr val="accent1"/>
+          </a:effectRef>
+          <a:fontRef idx="minor">
+            <a:schemeClr val="tx1"/>
+          </a:fontRef>
+        </p:style>
+      </p:cxnSp>
+      <p:sp>
+        <p:nvSpPr>
+          <p:cNvPr id="10" name="Rounded Rectangle 9"/>
           <p:cNvSpPr/>
           <p:nvPr/>
         </p:nvSpPr>
         <p:spPr>
           <a:xfrm>
-            <a:off x="731520" y="2606040"/>
-            <a:ext cx="3429000" cy="914400"/>
+            <a:off x="4434840" y="2240280"/>
+            <a:ext cx="1600200" cy="1234440"/>
           </a:xfrm>
           <a:prstGeom prst="roundRect">
             <a:avLst/>
           </a:prstGeom>
           <a:solidFill>
-            <a:srgbClr val="EEF4F8"/>
+            <a:srgbClr val="EEF4FA"/>
           </a:solidFill>
           <a:ln>
             <a:solidFill>
-              <a:srgbClr val="C5D4E3"/>
+              <a:srgbClr val="C8D5E3"/>
             </a:solidFill>
           </a:ln>
         </p:spPr>
@@ -3993,19 +5779,20 @@
           <a:lstStyle/>
           <a:p>
             <a:pPr algn="ctr"/>
-          </a:p>
-        </p:txBody>
-      </p:sp>
-      <p:sp>
-        <p:nvSpPr>
-          <p:cNvPr id="10" name="TextBox 9"/>
+            <a:endParaRPr/>
+          </a:p>
+        </p:txBody>
+      </p:sp>
+      <p:sp>
+        <p:nvSpPr>
+          <p:cNvPr id="11" name="TextBox 10"/>
           <p:cNvSpPr txBox="1"/>
           <p:nvPr/>
         </p:nvSpPr>
         <p:spPr>
           <a:xfrm>
-            <a:off x="841248" y="2697480"/>
-            <a:ext cx="3246120" cy="219456"/>
+            <a:off x="4544568" y="2514600"/>
+            <a:ext cx="1371600" cy="640080"/>
           </a:xfrm>
           <a:prstGeom prst="rect">
             <a:avLst/>
@@ -4013,81 +5800,84 @@
           <a:noFill/>
         </p:spPr>
         <p:txBody>
-          <a:bodyPr wrap="none">
+          <a:bodyPr wrap="square" anchor="t">
             <a:spAutoFit/>
           </a:bodyPr>
           <a:lstStyle/>
           <a:p>
-            <a:pPr>
-              <a:defRPr b="1" sz="1600">
-                <a:solidFill>
-                  <a:srgbClr val="203047"/>
+            <a:pPr algn="ctr">
+              <a:defRPr sz="1300" b="1">
+                <a:solidFill>
+                  <a:srgbClr val="1F3552"/>
                 </a:solidFill>
                 <a:latin typeface="Aptos"/>
               </a:defRPr>
             </a:pPr>
             <a:r>
-              <a:t>Sharpness</a:t>
-            </a:r>
-          </a:p>
-        </p:txBody>
-      </p:sp>
-      <p:sp>
-        <p:nvSpPr>
-          <p:cNvPr id="11" name="TextBox 10"/>
-          <p:cNvSpPr txBox="1"/>
-          <p:nvPr/>
-        </p:nvSpPr>
-        <p:spPr>
-          <a:xfrm>
-            <a:off x="841248" y="2971800"/>
-            <a:ext cx="3246120" cy="502920"/>
-          </a:xfrm>
-          <a:prstGeom prst="rect">
-            <a:avLst/>
-          </a:prstGeom>
-          <a:noFill/>
-        </p:spPr>
-        <p:txBody>
-          <a:bodyPr wrap="none">
-            <a:spAutoFit/>
-          </a:bodyPr>
-          <a:lstStyle/>
-          <a:p>
-            <a:pPr>
-              <a:defRPr sz="1100">
-                <a:solidFill>
-                  <a:srgbClr val="5F7693"/>
-                </a:solidFill>
-                <a:latin typeface="Aptos"/>
-              </a:defRPr>
-            </a:pPr>
-            <a:r>
-              <a:t>Uses Laplacian variance for edge clarity</a:t>
-            </a:r>
-          </a:p>
-        </p:txBody>
-      </p:sp>
-      <p:sp>
-        <p:nvSpPr>
-          <p:cNvPr id="12" name="Rounded Rectangle 11"/>
+              <a:t>CLAHE on</a:t>
+            </a:r>
+            <a:br/>
+            <a:r>
+              <a:t>luminance</a:t>
+            </a:r>
+          </a:p>
+        </p:txBody>
+      </p:sp>
+      <p:cxnSp>
+        <p:nvCxnSpPr>
+          <p:cNvPr id="12" name="Connector 11"/>
+          <p:cNvCxnSpPr/>
+          <p:nvPr/>
+        </p:nvCxnSpPr>
+        <p:spPr>
+          <a:xfrm>
+            <a:off x="6035040" y="2852928"/>
+            <a:ext cx="228600" cy="0"/>
+          </a:xfrm>
+          <a:prstGeom prst="line">
+            <a:avLst/>
+          </a:prstGeom>
+          <a:ln w="25400">
+            <a:solidFill>
+              <a:srgbClr val="4C77A8"/>
+            </a:solidFill>
+          </a:ln>
+        </p:spPr>
+        <p:style>
+          <a:lnRef idx="2">
+            <a:schemeClr val="accent1"/>
+          </a:lnRef>
+          <a:fillRef idx="0">
+            <a:schemeClr val="accent1"/>
+          </a:fillRef>
+          <a:effectRef idx="1">
+            <a:schemeClr val="accent1"/>
+          </a:effectRef>
+          <a:fontRef idx="minor">
+            <a:schemeClr val="tx1"/>
+          </a:fontRef>
+        </p:style>
+      </p:cxnSp>
+      <p:sp>
+        <p:nvSpPr>
+          <p:cNvPr id="13" name="Rounded Rectangle 12"/>
           <p:cNvSpPr/>
           <p:nvPr/>
         </p:nvSpPr>
         <p:spPr>
           <a:xfrm>
-            <a:off x="4709159" y="2606040"/>
-            <a:ext cx="3429000" cy="914400"/>
+            <a:off x="6309359" y="2240280"/>
+            <a:ext cx="1600200" cy="1234440"/>
           </a:xfrm>
           <a:prstGeom prst="roundRect">
             <a:avLst/>
           </a:prstGeom>
           <a:solidFill>
-            <a:srgbClr val="EEF4F8"/>
+            <a:srgbClr val="FFFFFF"/>
           </a:solidFill>
           <a:ln>
             <a:solidFill>
-              <a:srgbClr val="C5D4E3"/>
+              <a:srgbClr val="C8D5E3"/>
             </a:solidFill>
           </a:ln>
         </p:spPr>
@@ -4110,19 +5900,20 @@
           <a:lstStyle/>
           <a:p>
             <a:pPr algn="ctr"/>
-          </a:p>
-        </p:txBody>
-      </p:sp>
-      <p:sp>
-        <p:nvSpPr>
-          <p:cNvPr id="13" name="TextBox 12"/>
+            <a:endParaRPr/>
+          </a:p>
+        </p:txBody>
+      </p:sp>
+      <p:sp>
+        <p:nvSpPr>
+          <p:cNvPr id="14" name="TextBox 13"/>
           <p:cNvSpPr txBox="1"/>
           <p:nvPr/>
         </p:nvSpPr>
         <p:spPr>
           <a:xfrm>
-            <a:off x="4818887" y="2697480"/>
-            <a:ext cx="3246120" cy="219456"/>
+            <a:off x="6419087" y="2514600"/>
+            <a:ext cx="1371600" cy="640080"/>
           </a:xfrm>
           <a:prstGeom prst="rect">
             <a:avLst/>
@@ -4130,81 +5921,84 @@
           <a:noFill/>
         </p:spPr>
         <p:txBody>
-          <a:bodyPr wrap="none">
+          <a:bodyPr wrap="square" anchor="t">
             <a:spAutoFit/>
           </a:bodyPr>
           <a:lstStyle/>
           <a:p>
-            <a:pPr>
-              <a:defRPr b="1" sz="1600">
-                <a:solidFill>
-                  <a:srgbClr val="203047"/>
+            <a:pPr algn="ctr">
+              <a:defRPr sz="1300" b="1">
+                <a:solidFill>
+                  <a:srgbClr val="1F3552"/>
                 </a:solidFill>
                 <a:latin typeface="Aptos"/>
               </a:defRPr>
             </a:pPr>
             <a:r>
-              <a:t>Noise</a:t>
-            </a:r>
-          </a:p>
-        </p:txBody>
-      </p:sp>
-      <p:sp>
-        <p:nvSpPr>
-          <p:cNvPr id="14" name="TextBox 13"/>
-          <p:cNvSpPr txBox="1"/>
-          <p:nvPr/>
-        </p:nvSpPr>
-        <p:spPr>
-          <a:xfrm>
-            <a:off x="4818887" y="2971800"/>
-            <a:ext cx="3246120" cy="502920"/>
-          </a:xfrm>
-          <a:prstGeom prst="rect">
-            <a:avLst/>
-          </a:prstGeom>
-          <a:noFill/>
-        </p:spPr>
-        <p:txBody>
-          <a:bodyPr wrap="none">
-            <a:spAutoFit/>
-          </a:bodyPr>
-          <a:lstStyle/>
-          <a:p>
-            <a:pPr>
-              <a:defRPr sz="1100">
-                <a:solidFill>
-                  <a:srgbClr val="5F7693"/>
-                </a:solidFill>
-                <a:latin typeface="Aptos"/>
-              </a:defRPr>
-            </a:pPr>
-            <a:r>
-              <a:t>Estimated from blur residual</a:t>
-            </a:r>
-          </a:p>
-        </p:txBody>
-      </p:sp>
-      <p:sp>
-        <p:nvSpPr>
-          <p:cNvPr id="15" name="Rounded Rectangle 14"/>
+              <a:t>Selective</a:t>
+            </a:r>
+            <a:br/>
+            <a:r>
+              <a:t>luminance lift</a:t>
+            </a:r>
+          </a:p>
+        </p:txBody>
+      </p:sp>
+      <p:cxnSp>
+        <p:nvCxnSpPr>
+          <p:cNvPr id="15" name="Connector 14"/>
+          <p:cNvCxnSpPr/>
+          <p:nvPr/>
+        </p:nvCxnSpPr>
+        <p:spPr>
+          <a:xfrm>
+            <a:off x="7909559" y="2852928"/>
+            <a:ext cx="228600" cy="0"/>
+          </a:xfrm>
+          <a:prstGeom prst="line">
+            <a:avLst/>
+          </a:prstGeom>
+          <a:ln w="25400">
+            <a:solidFill>
+              <a:srgbClr val="4C77A8"/>
+            </a:solidFill>
+          </a:ln>
+        </p:spPr>
+        <p:style>
+          <a:lnRef idx="2">
+            <a:schemeClr val="accent1"/>
+          </a:lnRef>
+          <a:fillRef idx="0">
+            <a:schemeClr val="accent1"/>
+          </a:fillRef>
+          <a:effectRef idx="1">
+            <a:schemeClr val="accent1"/>
+          </a:effectRef>
+          <a:fontRef idx="minor">
+            <a:schemeClr val="tx1"/>
+          </a:fontRef>
+        </p:style>
+      </p:cxnSp>
+      <p:sp>
+        <p:nvSpPr>
+          <p:cNvPr id="16" name="Rounded Rectangle 15"/>
           <p:cNvSpPr/>
           <p:nvPr/>
         </p:nvSpPr>
         <p:spPr>
           <a:xfrm>
-            <a:off x="731520" y="4023360"/>
-            <a:ext cx="3429000" cy="914400"/>
+            <a:off x="8183879" y="2240280"/>
+            <a:ext cx="1600200" cy="1234440"/>
           </a:xfrm>
           <a:prstGeom prst="roundRect">
             <a:avLst/>
           </a:prstGeom>
           <a:solidFill>
-            <a:srgbClr val="EEF4F8"/>
+            <a:srgbClr val="EEF4FA"/>
           </a:solidFill>
           <a:ln>
             <a:solidFill>
-              <a:srgbClr val="C5D4E3"/>
+              <a:srgbClr val="C8D5E3"/>
             </a:solidFill>
           </a:ln>
         </p:spPr>
@@ -4227,19 +6021,20 @@
           <a:lstStyle/>
           <a:p>
             <a:pPr algn="ctr"/>
-          </a:p>
-        </p:txBody>
-      </p:sp>
-      <p:sp>
-        <p:nvSpPr>
-          <p:cNvPr id="16" name="TextBox 15"/>
+            <a:endParaRPr/>
+          </a:p>
+        </p:txBody>
+      </p:sp>
+      <p:sp>
+        <p:nvSpPr>
+          <p:cNvPr id="17" name="TextBox 16"/>
           <p:cNvSpPr txBox="1"/>
           <p:nvPr/>
         </p:nvSpPr>
         <p:spPr>
           <a:xfrm>
-            <a:off x="841248" y="4114800"/>
-            <a:ext cx="3246120" cy="219456"/>
+            <a:off x="8293607" y="2514600"/>
+            <a:ext cx="1371600" cy="640080"/>
           </a:xfrm>
           <a:prstGeom prst="rect">
             <a:avLst/>
@@ -4247,81 +6042,84 @@
           <a:noFill/>
         </p:spPr>
         <p:txBody>
-          <a:bodyPr wrap="none">
+          <a:bodyPr wrap="square" anchor="t">
             <a:spAutoFit/>
           </a:bodyPr>
           <a:lstStyle/>
           <a:p>
-            <a:pPr>
-              <a:defRPr b="1" sz="1600">
-                <a:solidFill>
-                  <a:srgbClr val="203047"/>
+            <a:pPr algn="ctr">
+              <a:defRPr sz="1300" b="1">
+                <a:solidFill>
+                  <a:srgbClr val="1F3552"/>
                 </a:solidFill>
                 <a:latin typeface="Aptos"/>
               </a:defRPr>
             </a:pPr>
             <a:r>
-              <a:t>Dynamic Range</a:t>
-            </a:r>
-          </a:p>
-        </p:txBody>
-      </p:sp>
-      <p:sp>
-        <p:nvSpPr>
-          <p:cNvPr id="17" name="TextBox 16"/>
-          <p:cNvSpPr txBox="1"/>
-          <p:nvPr/>
-        </p:nvSpPr>
-        <p:spPr>
-          <a:xfrm>
-            <a:off x="841248" y="4389120"/>
-            <a:ext cx="3246120" cy="502920"/>
-          </a:xfrm>
-          <a:prstGeom prst="rect">
-            <a:avLst/>
-          </a:prstGeom>
-          <a:noFill/>
-        </p:spPr>
-        <p:txBody>
-          <a:bodyPr wrap="none">
-            <a:spAutoFit/>
-          </a:bodyPr>
-          <a:lstStyle/>
-          <a:p>
-            <a:pPr>
-              <a:defRPr sz="1100">
-                <a:solidFill>
-                  <a:srgbClr val="5F7693"/>
-                </a:solidFill>
-                <a:latin typeface="Aptos"/>
-              </a:defRPr>
-            </a:pPr>
-            <a:r>
-              <a:t>95th minus 5th percentile intensity</a:t>
-            </a:r>
-          </a:p>
-        </p:txBody>
-      </p:sp>
-      <p:sp>
-        <p:nvSpPr>
-          <p:cNvPr id="18" name="Rounded Rectangle 17"/>
+              <a:t>Adaptive</a:t>
+            </a:r>
+            <a:br/>
+            <a:r>
+              <a:t>denoising</a:t>
+            </a:r>
+          </a:p>
+        </p:txBody>
+      </p:sp>
+      <p:cxnSp>
+        <p:nvCxnSpPr>
+          <p:cNvPr id="18" name="Connector 17"/>
+          <p:cNvCxnSpPr/>
+          <p:nvPr/>
+        </p:nvCxnSpPr>
+        <p:spPr>
+          <a:xfrm>
+            <a:off x="9784079" y="2852928"/>
+            <a:ext cx="228600" cy="0"/>
+          </a:xfrm>
+          <a:prstGeom prst="line">
+            <a:avLst/>
+          </a:prstGeom>
+          <a:ln w="25400">
+            <a:solidFill>
+              <a:srgbClr val="4C77A8"/>
+            </a:solidFill>
+          </a:ln>
+        </p:spPr>
+        <p:style>
+          <a:lnRef idx="2">
+            <a:schemeClr val="accent1"/>
+          </a:lnRef>
+          <a:fillRef idx="0">
+            <a:schemeClr val="accent1"/>
+          </a:fillRef>
+          <a:effectRef idx="1">
+            <a:schemeClr val="accent1"/>
+          </a:effectRef>
+          <a:fontRef idx="minor">
+            <a:schemeClr val="tx1"/>
+          </a:fontRef>
+        </p:style>
+      </p:cxnSp>
+      <p:sp>
+        <p:nvSpPr>
+          <p:cNvPr id="19" name="Rounded Rectangle 18"/>
           <p:cNvSpPr/>
           <p:nvPr/>
         </p:nvSpPr>
         <p:spPr>
           <a:xfrm>
-            <a:off x="4709159" y="4023360"/>
-            <a:ext cx="3429000" cy="914400"/>
+            <a:off x="10058400" y="2240280"/>
+            <a:ext cx="1600200" cy="1234440"/>
           </a:xfrm>
           <a:prstGeom prst="roundRect">
             <a:avLst/>
           </a:prstGeom>
           <a:solidFill>
-            <a:srgbClr val="EEF4F8"/>
+            <a:srgbClr val="FFFFFF"/>
           </a:solidFill>
           <a:ln>
             <a:solidFill>
-              <a:srgbClr val="C5D4E3"/>
+              <a:srgbClr val="C8D5E3"/>
             </a:solidFill>
           </a:ln>
         </p:spPr>
@@ -4344,19 +6142,20 @@
           <a:lstStyle/>
           <a:p>
             <a:pPr algn="ctr"/>
-          </a:p>
-        </p:txBody>
-      </p:sp>
-      <p:sp>
-        <p:nvSpPr>
-          <p:cNvPr id="19" name="TextBox 18"/>
+            <a:endParaRPr/>
+          </a:p>
+        </p:txBody>
+      </p:sp>
+      <p:sp>
+        <p:nvSpPr>
+          <p:cNvPr id="20" name="TextBox 19"/>
           <p:cNvSpPr txBox="1"/>
           <p:nvPr/>
         </p:nvSpPr>
         <p:spPr>
           <a:xfrm>
-            <a:off x="4818887" y="4114800"/>
-            <a:ext cx="3246120" cy="219456"/>
+            <a:off x="10168128" y="2514600"/>
+            <a:ext cx="1371600" cy="640080"/>
           </a:xfrm>
           <a:prstGeom prst="rect">
             <a:avLst/>
@@ -4364,35 +6163,39 @@
           <a:noFill/>
         </p:spPr>
         <p:txBody>
-          <a:bodyPr wrap="none">
+          <a:bodyPr wrap="square" anchor="t">
             <a:spAutoFit/>
           </a:bodyPr>
           <a:lstStyle/>
           <a:p>
-            <a:pPr>
-              <a:defRPr b="1" sz="1600">
-                <a:solidFill>
-                  <a:srgbClr val="203047"/>
+            <a:pPr algn="ctr">
+              <a:defRPr sz="1300" b="1">
+                <a:solidFill>
+                  <a:srgbClr val="1F3552"/>
                 </a:solidFill>
                 <a:latin typeface="Aptos"/>
               </a:defRPr>
             </a:pPr>
             <a:r>
-              <a:t>Colorfulness</a:t>
-            </a:r>
-          </a:p>
-        </p:txBody>
-      </p:sp>
-      <p:sp>
-        <p:nvSpPr>
-          <p:cNvPr id="20" name="TextBox 19"/>
+              <a:t>Unsharp mask</a:t>
+            </a:r>
+            <a:br/>
+            <a:r>
+              <a:t>+ protection</a:t>
+            </a:r>
+          </a:p>
+        </p:txBody>
+      </p:sp>
+      <p:sp>
+        <p:nvSpPr>
+          <p:cNvPr id="21" name="TextBox 20"/>
           <p:cNvSpPr txBox="1"/>
           <p:nvPr/>
         </p:nvSpPr>
         <p:spPr>
           <a:xfrm>
-            <a:off x="4818887" y="4389120"/>
-            <a:ext cx="3246120" cy="502920"/>
+            <a:off x="749808" y="4754880"/>
+            <a:ext cx="7315200" cy="274320"/>
           </a:xfrm>
           <a:prstGeom prst="rect">
             <a:avLst/>
@@ -4400,21 +6203,21 @@
           <a:noFill/>
         </p:spPr>
         <p:txBody>
-          <a:bodyPr wrap="none">
+          <a:bodyPr wrap="square" anchor="t">
             <a:spAutoFit/>
           </a:bodyPr>
           <a:lstStyle/>
           <a:p>
-            <a:pPr>
-              <a:defRPr sz="1100">
-                <a:solidFill>
-                  <a:srgbClr val="5F7693"/>
+            <a:pPr algn="l">
+              <a:defRPr sz="1500" b="0">
+                <a:solidFill>
+                  <a:srgbClr val="617892"/>
                 </a:solidFill>
                 <a:latin typeface="Aptos"/>
               </a:defRPr>
             </a:pPr>
             <a:r>
-              <a:t>Measures vividness of color distribution</a:t>
+              <a:t>Each candidate output is scored, and the best one is returned.</a:t>
             </a:r>
           </a:p>
         </p:txBody>
@@ -4428,12 +6231,12 @@
 </file>
 
 <file path=ppt/slides/slide5.xml><?xml version="1.0" encoding="utf-8"?>
-<p:sld xmlns:a="http://schemas.openxmlformats.org/drawingml/2006/main" xmlns:p="http://schemas.openxmlformats.org/presentationml/2006/main" xmlns:r="http://schemas.openxmlformats.org/officeDocument/2006/relationships">
+<p:sld xmlns:a="http://schemas.openxmlformats.org/drawingml/2006/main" xmlns:r="http://schemas.openxmlformats.org/officeDocument/2006/relationships" xmlns:p="http://schemas.openxmlformats.org/presentationml/2006/main">
   <p:cSld>
     <p:bg>
       <p:bgPr>
         <a:solidFill>
-          <a:srgbClr val="F7FAFD"/>
+          <a:srgbClr val="FFFFFF"/>
         </a:solidFill>
         <a:effectLst/>
       </p:bgPr>
@@ -4444,7 +6247,14 @@
         <p:cNvGrpSpPr/>
         <p:nvPr/>
       </p:nvGrpSpPr>
-      <p:grpSpPr/>
+      <p:grpSpPr>
+        <a:xfrm>
+          <a:off x="0" y="0"/>
+          <a:ext cx="0" cy="0"/>
+          <a:chOff x="0" y="0"/>
+          <a:chExt cx="0" cy="0"/>
+        </a:xfrm>
+      </p:grpSpPr>
       <p:sp>
         <p:nvSpPr>
           <p:cNvPr id="2" name="TextBox 1"/>
@@ -4453,8 +6263,8 @@
         </p:nvSpPr>
         <p:spPr>
           <a:xfrm>
-            <a:off x="548640" y="365760"/>
-            <a:ext cx="7315200" cy="457200"/>
+            <a:off x="594360" y="320040"/>
+            <a:ext cx="4114800" cy="228600"/>
           </a:xfrm>
           <a:prstGeom prst="rect">
             <a:avLst/>
@@ -4462,21 +6272,21 @@
           <a:noFill/>
         </p:spPr>
         <p:txBody>
-          <a:bodyPr wrap="none">
+          <a:bodyPr wrap="square" anchor="t">
             <a:spAutoFit/>
           </a:bodyPr>
           <a:lstStyle/>
           <a:p>
-            <a:pPr>
-              <a:defRPr sz="2400" b="1">
-                <a:solidFill>
-                  <a:srgbClr val="203047"/>
+            <a:pPr algn="l">
+              <a:defRPr sz="1000" b="1">
+                <a:solidFill>
+                  <a:srgbClr val="4C77A8"/>
                 </a:solidFill>
                 <a:latin typeface="Aptos"/>
               </a:defRPr>
             </a:pPr>
             <a:r>
-              <a:t>OpenCV Enhancement Pipeline</a:t>
+              <a:t>USER OUTPUT</a:t>
             </a:r>
           </a:p>
         </p:txBody>
@@ -4489,8 +6299,8 @@
         </p:nvSpPr>
         <p:spPr>
           <a:xfrm>
-            <a:off x="777240" y="1097280"/>
-            <a:ext cx="10058400" cy="4389120"/>
+            <a:off x="594360" y="576072"/>
+            <a:ext cx="9601200" cy="502920"/>
           </a:xfrm>
           <a:prstGeom prst="rect">
             <a:avLst/>
@@ -4498,144 +6308,81 @@
           <a:noFill/>
         </p:spPr>
         <p:txBody>
-          <a:bodyPr wrap="none">
+          <a:bodyPr wrap="square" anchor="t">
             <a:spAutoFit/>
           </a:bodyPr>
           <a:lstStyle/>
           <a:p>
-            <a:pPr>
-              <a:spcAft>
-                <a:spcPts val="1000"/>
-              </a:spcAft>
-              <a:defRPr sz="1800">
-                <a:solidFill>
-                  <a:srgbClr val="203047"/>
+            <a:pPr algn="l">
+              <a:defRPr sz="2400" b="1">
+                <a:solidFill>
+                  <a:srgbClr val="1F3552"/>
                 </a:solidFill>
                 <a:latin typeface="Aptos"/>
               </a:defRPr>
             </a:pPr>
             <a:r>
-              <a:t>Gray-world white balance to reduce global color cast.</a:t>
-            </a:r>
-          </a:p>
-          <a:p>
-            <a:pPr>
-              <a:spcAft>
-                <a:spcPts val="1000"/>
-              </a:spcAft>
-              <a:defRPr sz="1800">
-                <a:solidFill>
-                  <a:srgbClr val="203047"/>
-                </a:solidFill>
-                <a:latin typeface="Aptos"/>
-              </a:defRPr>
-            </a:pPr>
-            <a:r>
-              <a:t>Adaptive gamma correction for exposure control.</a:t>
-            </a:r>
-          </a:p>
-          <a:p>
-            <a:pPr>
-              <a:spcAft>
-                <a:spcPts val="1000"/>
-              </a:spcAft>
-              <a:defRPr sz="1800">
-                <a:solidFill>
-                  <a:srgbClr val="203047"/>
-                </a:solidFill>
-                <a:latin typeface="Aptos"/>
-              </a:defRPr>
-            </a:pPr>
-            <a:r>
-              <a:t>CLAHE on the luminance channel for local contrast enhancement.</a:t>
-            </a:r>
-          </a:p>
-          <a:p>
-            <a:pPr>
-              <a:spcAft>
-                <a:spcPts val="1000"/>
-              </a:spcAft>
-              <a:defRPr sz="1800">
-                <a:solidFill>
-                  <a:srgbClr val="203047"/>
-                </a:solidFill>
-                <a:latin typeface="Aptos"/>
-              </a:defRPr>
-            </a:pPr>
-            <a:r>
-              <a:t>Selective luminance lift to brighten darker regions more than highlights.</a:t>
-            </a:r>
-          </a:p>
-          <a:p>
-            <a:pPr>
-              <a:spcAft>
-                <a:spcPts val="1000"/>
-              </a:spcAft>
-              <a:defRPr sz="1800">
-                <a:solidFill>
-                  <a:srgbClr val="203047"/>
-                </a:solidFill>
-                <a:latin typeface="Aptos"/>
-              </a:defRPr>
-            </a:pPr>
-            <a:r>
-              <a:t>Adaptive denoising based on estimated noise level.</a:t>
-            </a:r>
-          </a:p>
-          <a:p>
-            <a:pPr>
-              <a:spcAft>
-                <a:spcPts val="1000"/>
-              </a:spcAft>
-              <a:defRPr sz="1800">
-                <a:solidFill>
-                  <a:srgbClr val="203047"/>
-                </a:solidFill>
-                <a:latin typeface="Aptos"/>
-              </a:defRPr>
-            </a:pPr>
-            <a:r>
-              <a:t>Unsharp masking, highlight/shadow protection, and color preservation.</a:t>
-            </a:r>
-          </a:p>
-        </p:txBody>
-      </p:sp>
-    </p:spTree>
-  </p:cSld>
-  <p:clrMapOvr>
-    <a:masterClrMapping/>
-  </p:clrMapOvr>
-</p:sld>
-</file>
-
-<file path=ppt/slides/slide6.xml><?xml version="1.0" encoding="utf-8"?>
-<p:sld xmlns:a="http://schemas.openxmlformats.org/drawingml/2006/main" xmlns:p="http://schemas.openxmlformats.org/presentationml/2006/main" xmlns:r="http://schemas.openxmlformats.org/officeDocument/2006/relationships">
-  <p:cSld>
-    <p:bg>
-      <p:bgPr>
-        <a:solidFill>
-          <a:srgbClr val="F7FAFD"/>
-        </a:solidFill>
-        <a:effectLst/>
-      </p:bgPr>
-    </p:bg>
-    <p:spTree>
-      <p:nvGrpSpPr>
-        <p:cNvPr id="1" name=""/>
-        <p:cNvGrpSpPr/>
-        <p:nvPr/>
-      </p:nvGrpSpPr>
-      <p:grpSpPr/>
-      <p:sp>
-        <p:nvSpPr>
-          <p:cNvPr id="2" name="TextBox 1"/>
+              <a:t>What the user sees after assessment</a:t>
+            </a:r>
+          </a:p>
+        </p:txBody>
+      </p:sp>
+      <p:sp>
+        <p:nvSpPr>
+          <p:cNvPr id="4" name="Rounded Rectangle 3"/>
+          <p:cNvSpPr/>
+          <p:nvPr/>
+        </p:nvSpPr>
+        <p:spPr>
+          <a:xfrm>
+            <a:off x="731520" y="1600200"/>
+            <a:ext cx="5074920" cy="1417320"/>
+          </a:xfrm>
+          <a:prstGeom prst="roundRect">
+            <a:avLst/>
+          </a:prstGeom>
+          <a:solidFill>
+            <a:srgbClr val="EEF4FA"/>
+          </a:solidFill>
+          <a:ln w="12700">
+            <a:solidFill>
+              <a:srgbClr val="C8D5E3"/>
+            </a:solidFill>
+          </a:ln>
+        </p:spPr>
+        <p:style>
+          <a:lnRef idx="1">
+            <a:schemeClr val="accent1"/>
+          </a:lnRef>
+          <a:fillRef idx="3">
+            <a:schemeClr val="accent1"/>
+          </a:fillRef>
+          <a:effectRef idx="2">
+            <a:schemeClr val="accent1"/>
+          </a:effectRef>
+          <a:fontRef idx="minor">
+            <a:schemeClr val="lt1"/>
+          </a:fontRef>
+        </p:style>
+        <p:txBody>
+          <a:bodyPr rtlCol="0" anchor="ctr"/>
+          <a:lstStyle/>
+          <a:p>
+            <a:pPr algn="ctr"/>
+            <a:endParaRPr/>
+          </a:p>
+        </p:txBody>
+      </p:sp>
+      <p:sp>
+        <p:nvSpPr>
+          <p:cNvPr id="5" name="TextBox 4"/>
           <p:cNvSpPr txBox="1"/>
           <p:nvPr/>
         </p:nvSpPr>
         <p:spPr>
           <a:xfrm>
-            <a:off x="548640" y="365760"/>
-            <a:ext cx="7772400" cy="457200"/>
+            <a:off x="896112" y="1728216"/>
+            <a:ext cx="4800600" cy="256032"/>
           </a:xfrm>
           <a:prstGeom prst="rect">
             <a:avLst/>
@@ -4643,35 +6390,35 @@
           <a:noFill/>
         </p:spPr>
         <p:txBody>
-          <a:bodyPr wrap="none">
+          <a:bodyPr wrap="square" anchor="t">
             <a:spAutoFit/>
           </a:bodyPr>
           <a:lstStyle/>
           <a:p>
-            <a:pPr>
-              <a:defRPr sz="2400" b="1">
-                <a:solidFill>
-                  <a:srgbClr val="203047"/>
+            <a:pPr algn="l">
+              <a:defRPr sz="1600" b="1">
+                <a:solidFill>
+                  <a:srgbClr val="1F3552"/>
                 </a:solidFill>
                 <a:latin typeface="Aptos"/>
               </a:defRPr>
             </a:pPr>
             <a:r>
-              <a:t>Assessment-First Decision Logic</a:t>
-            </a:r>
-          </a:p>
-        </p:txBody>
-      </p:sp>
-      <p:sp>
-        <p:nvSpPr>
-          <p:cNvPr id="3" name="TextBox 2"/>
+              <a:t>Original panel</a:t>
+            </a:r>
+          </a:p>
+        </p:txBody>
+      </p:sp>
+      <p:sp>
+        <p:nvSpPr>
+          <p:cNvPr id="6" name="TextBox 5"/>
           <p:cNvSpPr txBox="1"/>
           <p:nvPr/>
         </p:nvSpPr>
         <p:spPr>
           <a:xfrm>
-            <a:off x="777240" y="1097280"/>
-            <a:ext cx="10058400" cy="4389120"/>
+            <a:off x="896112" y="2039112"/>
+            <a:ext cx="4800600" cy="914400"/>
           </a:xfrm>
           <a:prstGeom prst="rect">
             <a:avLst/>
@@ -4679,112 +6426,89 @@
           <a:noFill/>
         </p:spPr>
         <p:txBody>
-          <a:bodyPr wrap="none">
+          <a:bodyPr wrap="square" anchor="t">
             <a:spAutoFit/>
           </a:bodyPr>
           <a:lstStyle/>
           <a:p>
-            <a:pPr>
-              <a:spcAft>
-                <a:spcPts val="1000"/>
-              </a:spcAft>
-              <a:defRPr sz="1800">
-                <a:solidFill>
-                  <a:srgbClr val="203047"/>
+            <a:pPr algn="l">
+              <a:defRPr sz="1100" b="0">
+                <a:solidFill>
+                  <a:srgbClr val="617892"/>
                 </a:solidFill>
                 <a:latin typeface="Aptos"/>
               </a:defRPr>
             </a:pPr>
             <a:r>
-              <a:t>The backend computes an overall quality score from multiple metrics.</a:t>
-            </a:r>
-          </a:p>
-          <a:p>
-            <a:pPr>
-              <a:spcAft>
-                <a:spcPts val="1000"/>
-              </a:spcAft>
-              <a:defRPr sz="1800">
-                <a:solidFill>
-                  <a:srgbClr val="203047"/>
-                </a:solidFill>
-                <a:latin typeface="Aptos"/>
-              </a:defRPr>
-            </a:pPr>
-            <a:r>
-              <a:t>If the score is at least 90%, the image is preserved and no enhancement is applied.</a:t>
-            </a:r>
-          </a:p>
-          <a:p>
-            <a:pPr>
-              <a:spcAft>
-                <a:spcPts val="1000"/>
-              </a:spcAft>
-              <a:defRPr sz="1800">
-                <a:solidFill>
-                  <a:srgbClr val="203047"/>
-                </a:solidFill>
-                <a:latin typeface="Aptos"/>
-              </a:defRPr>
-            </a:pPr>
-            <a:r>
-              <a:t>If the score is below 90%, the backend detects issues such as low brightness, soft details, or visible noise.</a:t>
-            </a:r>
-          </a:p>
-          <a:p>
-            <a:pPr>
-              <a:spcAft>
-                <a:spcPts val="1000"/>
-              </a:spcAft>
-              <a:defRPr sz="1800">
-                <a:solidFill>
-                  <a:srgbClr val="203047"/>
-                </a:solidFill>
-                <a:latin typeface="Aptos"/>
-              </a:defRPr>
-            </a:pPr>
-            <a:r>
-              <a:t>Enhancement modes are selected according to detected issues instead of using one fixed formula.</a:t>
-            </a:r>
-          </a:p>
-        </p:txBody>
-      </p:sp>
-    </p:spTree>
-  </p:cSld>
-  <p:clrMapOvr>
-    <a:masterClrMapping/>
-  </p:clrMapOvr>
-</p:sld>
-</file>
-
-<file path=ppt/slides/slide7.xml><?xml version="1.0" encoding="utf-8"?>
-<p:sld xmlns:a="http://schemas.openxmlformats.org/drawingml/2006/main" xmlns:p="http://schemas.openxmlformats.org/presentationml/2006/main" xmlns:r="http://schemas.openxmlformats.org/officeDocument/2006/relationships">
-  <p:cSld>
-    <p:bg>
-      <p:bgPr>
-        <a:solidFill>
-          <a:srgbClr val="F7FAFD"/>
-        </a:solidFill>
-        <a:effectLst/>
-      </p:bgPr>
-    </p:bg>
-    <p:spTree>
-      <p:nvGrpSpPr>
-        <p:cNvPr id="1" name=""/>
-        <p:cNvGrpSpPr/>
-        <p:nvPr/>
-      </p:nvGrpSpPr>
-      <p:grpSpPr/>
-      <p:sp>
-        <p:nvSpPr>
-          <p:cNvPr id="2" name="TextBox 1"/>
+              <a:t>Preview image</a:t>
+            </a:r>
+            <a:br/>
+            <a:r>
+              <a:t>Original quality score</a:t>
+            </a:r>
+            <a:br/>
+            <a:r>
+              <a:t>Original metrics</a:t>
+            </a:r>
+          </a:p>
+        </p:txBody>
+      </p:sp>
+      <p:sp>
+        <p:nvSpPr>
+          <p:cNvPr id="7" name="Rounded Rectangle 6"/>
+          <p:cNvSpPr/>
+          <p:nvPr/>
+        </p:nvSpPr>
+        <p:spPr>
+          <a:xfrm>
+            <a:off x="6355080" y="1600200"/>
+            <a:ext cx="5074920" cy="1417320"/>
+          </a:xfrm>
+          <a:prstGeom prst="roundRect">
+            <a:avLst/>
+          </a:prstGeom>
+          <a:solidFill>
+            <a:srgbClr val="FFFFFF"/>
+          </a:solidFill>
+          <a:ln w="12700">
+            <a:solidFill>
+              <a:srgbClr val="C8D5E3"/>
+            </a:solidFill>
+          </a:ln>
+        </p:spPr>
+        <p:style>
+          <a:lnRef idx="1">
+            <a:schemeClr val="accent1"/>
+          </a:lnRef>
+          <a:fillRef idx="3">
+            <a:schemeClr val="accent1"/>
+          </a:fillRef>
+          <a:effectRef idx="2">
+            <a:schemeClr val="accent1"/>
+          </a:effectRef>
+          <a:fontRef idx="minor">
+            <a:schemeClr val="lt1"/>
+          </a:fontRef>
+        </p:style>
+        <p:txBody>
+          <a:bodyPr rtlCol="0" anchor="ctr"/>
+          <a:lstStyle/>
+          <a:p>
+            <a:pPr algn="ctr"/>
+            <a:endParaRPr/>
+          </a:p>
+        </p:txBody>
+      </p:sp>
+      <p:sp>
+        <p:nvSpPr>
+          <p:cNvPr id="8" name="TextBox 7"/>
           <p:cNvSpPr txBox="1"/>
           <p:nvPr/>
         </p:nvSpPr>
         <p:spPr>
           <a:xfrm>
-            <a:off x="548640" y="365760"/>
-            <a:ext cx="7315200" cy="457200"/>
+            <a:off x="6519672" y="1728216"/>
+            <a:ext cx="4800600" cy="256032"/>
           </a:xfrm>
           <a:prstGeom prst="rect">
             <a:avLst/>
@@ -4792,35 +6516,35 @@
           <a:noFill/>
         </p:spPr>
         <p:txBody>
-          <a:bodyPr wrap="none">
+          <a:bodyPr wrap="square" anchor="t">
             <a:spAutoFit/>
           </a:bodyPr>
           <a:lstStyle/>
           <a:p>
-            <a:pPr>
-              <a:defRPr sz="2400" b="1">
-                <a:solidFill>
-                  <a:srgbClr val="203047"/>
+            <a:pPr algn="l">
+              <a:defRPr sz="1600" b="1">
+                <a:solidFill>
+                  <a:srgbClr val="1F3552"/>
                 </a:solidFill>
                 <a:latin typeface="Aptos"/>
               </a:defRPr>
             </a:pPr>
             <a:r>
-              <a:t>User-Facing Output</a:t>
-            </a:r>
-          </a:p>
-        </p:txBody>
-      </p:sp>
-      <p:sp>
-        <p:nvSpPr>
-          <p:cNvPr id="3" name="TextBox 2"/>
+              <a:t>Result panel</a:t>
+            </a:r>
+          </a:p>
+        </p:txBody>
+      </p:sp>
+      <p:sp>
+        <p:nvSpPr>
+          <p:cNvPr id="9" name="TextBox 8"/>
           <p:cNvSpPr txBox="1"/>
           <p:nvPr/>
         </p:nvSpPr>
         <p:spPr>
           <a:xfrm>
-            <a:off x="777240" y="1097280"/>
-            <a:ext cx="10058400" cy="4389120"/>
+            <a:off x="6519672" y="2039112"/>
+            <a:ext cx="4800600" cy="914400"/>
           </a:xfrm>
           <a:prstGeom prst="rect">
             <a:avLst/>
@@ -4828,128 +6552,89 @@
           <a:noFill/>
         </p:spPr>
         <p:txBody>
-          <a:bodyPr wrap="none">
+          <a:bodyPr wrap="square" anchor="t">
             <a:spAutoFit/>
           </a:bodyPr>
           <a:lstStyle/>
           <a:p>
-            <a:pPr>
-              <a:spcAft>
-                <a:spcPts val="1000"/>
-              </a:spcAft>
-              <a:defRPr sz="1800">
-                <a:solidFill>
-                  <a:srgbClr val="203047"/>
+            <a:pPr algn="l">
+              <a:defRPr sz="1100" b="0">
+                <a:solidFill>
+                  <a:srgbClr val="617892"/>
                 </a:solidFill>
                 <a:latin typeface="Aptos"/>
               </a:defRPr>
             </a:pPr>
             <a:r>
-              <a:t>Original and processed images are shown side by side.</a:t>
-            </a:r>
-          </a:p>
-          <a:p>
-            <a:pPr>
-              <a:spcAft>
-                <a:spcPts val="1000"/>
-              </a:spcAft>
-              <a:defRPr sz="1800">
-                <a:solidFill>
-                  <a:srgbClr val="203047"/>
-                </a:solidFill>
-                <a:latin typeface="Aptos"/>
-              </a:defRPr>
-            </a:pPr>
-            <a:r>
-              <a:t>Overall quality score and rating are shown for both versions.</a:t>
-            </a:r>
-          </a:p>
-          <a:p>
-            <a:pPr>
-              <a:spcAft>
-                <a:spcPts val="1000"/>
-              </a:spcAft>
-              <a:defRPr sz="1800">
-                <a:solidFill>
-                  <a:srgbClr val="203047"/>
-                </a:solidFill>
-                <a:latin typeface="Aptos"/>
-              </a:defRPr>
-            </a:pPr>
-            <a:r>
-              <a:t>Assessment panel explains whether enhancement was needed.</a:t>
-            </a:r>
-          </a:p>
-          <a:p>
-            <a:pPr>
-              <a:spcAft>
-                <a:spcPts val="1000"/>
-              </a:spcAft>
-              <a:defRPr sz="1800">
-                <a:solidFill>
-                  <a:srgbClr val="203047"/>
-                </a:solidFill>
-                <a:latin typeface="Aptos"/>
-              </a:defRPr>
-            </a:pPr>
-            <a:r>
-              <a:t>Improvement section summarizes metric changes.</a:t>
-            </a:r>
-          </a:p>
-          <a:p>
-            <a:pPr>
-              <a:spcAft>
-                <a:spcPts val="1000"/>
-              </a:spcAft>
-              <a:defRPr sz="1800">
-                <a:solidFill>
-                  <a:srgbClr val="203047"/>
-                </a:solidFill>
-                <a:latin typeface="Aptos"/>
-              </a:defRPr>
-            </a:pPr>
-            <a:r>
-              <a:t>The processed image can be downloaded directly from the interface.</a:t>
-            </a:r>
-          </a:p>
-        </p:txBody>
-      </p:sp>
-    </p:spTree>
-  </p:cSld>
-  <p:clrMapOvr>
-    <a:masterClrMapping/>
-  </p:clrMapOvr>
-</p:sld>
-</file>
-
-<file path=ppt/slides/slide8.xml><?xml version="1.0" encoding="utf-8"?>
-<p:sld xmlns:a="http://schemas.openxmlformats.org/drawingml/2006/main" xmlns:p="http://schemas.openxmlformats.org/presentationml/2006/main" xmlns:r="http://schemas.openxmlformats.org/officeDocument/2006/relationships">
-  <p:cSld>
-    <p:bg>
-      <p:bgPr>
-        <a:solidFill>
-          <a:srgbClr val="F7FAFD"/>
-        </a:solidFill>
-        <a:effectLst/>
-      </p:bgPr>
-    </p:bg>
-    <p:spTree>
-      <p:nvGrpSpPr>
-        <p:cNvPr id="1" name=""/>
-        <p:cNvGrpSpPr/>
-        <p:nvPr/>
-      </p:nvGrpSpPr>
-      <p:grpSpPr/>
-      <p:sp>
-        <p:nvSpPr>
-          <p:cNvPr id="2" name="TextBox 1"/>
+              <a:t>Enhanced or preserved image</a:t>
+            </a:r>
+            <a:br/>
+            <a:r>
+              <a:t>Enhanced quality score</a:t>
+            </a:r>
+            <a:br/>
+            <a:r>
+              <a:t>Enhanced metrics</a:t>
+            </a:r>
+          </a:p>
+        </p:txBody>
+      </p:sp>
+      <p:sp>
+        <p:nvSpPr>
+          <p:cNvPr id="10" name="Rounded Rectangle 9"/>
+          <p:cNvSpPr/>
+          <p:nvPr/>
+        </p:nvSpPr>
+        <p:spPr>
+          <a:xfrm>
+            <a:off x="731520" y="3337560"/>
+            <a:ext cx="5074920" cy="1417320"/>
+          </a:xfrm>
+          <a:prstGeom prst="roundRect">
+            <a:avLst/>
+          </a:prstGeom>
+          <a:solidFill>
+            <a:srgbClr val="FFFFFF"/>
+          </a:solidFill>
+          <a:ln w="12700">
+            <a:solidFill>
+              <a:srgbClr val="C8D5E3"/>
+            </a:solidFill>
+          </a:ln>
+        </p:spPr>
+        <p:style>
+          <a:lnRef idx="1">
+            <a:schemeClr val="accent1"/>
+          </a:lnRef>
+          <a:fillRef idx="3">
+            <a:schemeClr val="accent1"/>
+          </a:fillRef>
+          <a:effectRef idx="2">
+            <a:schemeClr val="accent1"/>
+          </a:effectRef>
+          <a:fontRef idx="minor">
+            <a:schemeClr val="lt1"/>
+          </a:fontRef>
+        </p:style>
+        <p:txBody>
+          <a:bodyPr rtlCol="0" anchor="ctr"/>
+          <a:lstStyle/>
+          <a:p>
+            <a:pPr algn="ctr"/>
+            <a:endParaRPr/>
+          </a:p>
+        </p:txBody>
+      </p:sp>
+      <p:sp>
+        <p:nvSpPr>
+          <p:cNvPr id="11" name="TextBox 10"/>
           <p:cNvSpPr txBox="1"/>
           <p:nvPr/>
         </p:nvSpPr>
         <p:spPr>
           <a:xfrm>
-            <a:off x="548640" y="365760"/>
-            <a:ext cx="7772400" cy="457200"/>
+            <a:off x="896112" y="3465576"/>
+            <a:ext cx="4800600" cy="256032"/>
           </a:xfrm>
           <a:prstGeom prst="rect">
             <a:avLst/>
@@ -4957,35 +6642,35 @@
           <a:noFill/>
         </p:spPr>
         <p:txBody>
-          <a:bodyPr wrap="none">
+          <a:bodyPr wrap="square" anchor="t">
             <a:spAutoFit/>
           </a:bodyPr>
           <a:lstStyle/>
           <a:p>
-            <a:pPr>
-              <a:defRPr sz="2400" b="1">
-                <a:solidFill>
-                  <a:srgbClr val="203047"/>
+            <a:pPr algn="l">
+              <a:defRPr sz="1600" b="1">
+                <a:solidFill>
+                  <a:srgbClr val="1F3552"/>
                 </a:solidFill>
                 <a:latin typeface="Aptos"/>
               </a:defRPr>
             </a:pPr>
             <a:r>
-              <a:t>Limitations and Future Scope</a:t>
-            </a:r>
-          </a:p>
-        </p:txBody>
-      </p:sp>
-      <p:sp>
-        <p:nvSpPr>
-          <p:cNvPr id="3" name="TextBox 2"/>
+              <a:t>Assessment panel</a:t>
+            </a:r>
+          </a:p>
+        </p:txBody>
+      </p:sp>
+      <p:sp>
+        <p:nvSpPr>
+          <p:cNvPr id="12" name="TextBox 11"/>
           <p:cNvSpPr txBox="1"/>
           <p:nvPr/>
         </p:nvSpPr>
         <p:spPr>
           <a:xfrm>
-            <a:off x="777240" y="1097280"/>
-            <a:ext cx="10058400" cy="4389120"/>
+            <a:off x="896112" y="3776472"/>
+            <a:ext cx="4800600" cy="914400"/>
           </a:xfrm>
           <a:prstGeom prst="rect">
             <a:avLst/>
@@ -4993,56 +6678,155 @@
           <a:noFill/>
         </p:spPr>
         <p:txBody>
-          <a:bodyPr wrap="none">
+          <a:bodyPr wrap="square" anchor="t">
             <a:spAutoFit/>
           </a:bodyPr>
           <a:lstStyle/>
           <a:p>
-            <a:pPr>
-              <a:spcAft>
-                <a:spcPts val="1000"/>
-              </a:spcAft>
-              <a:defRPr sz="1800">
-                <a:solidFill>
-                  <a:srgbClr val="203047"/>
+            <a:pPr algn="l">
+              <a:defRPr sz="1100" b="0">
+                <a:solidFill>
+                  <a:srgbClr val="617892"/>
                 </a:solidFill>
                 <a:latin typeface="Aptos"/>
               </a:defRPr>
             </a:pPr>
             <a:r>
-              <a:t>This is a classical computer vision pipeline, not a deep learning model.</a:t>
-            </a:r>
-          </a:p>
-          <a:p>
-            <a:pPr>
-              <a:spcAft>
-                <a:spcPts val="1000"/>
-              </a:spcAft>
-              <a:defRPr sz="1800">
-                <a:solidFill>
-                  <a:srgbClr val="203047"/>
+              <a:t>Decision</a:t>
+            </a:r>
+            <a:br/>
+            <a:r>
+              <a:t>Threshold</a:t>
+            </a:r>
+            <a:br/>
+            <a:r>
+              <a:t>Detected issues</a:t>
+            </a:r>
+          </a:p>
+        </p:txBody>
+      </p:sp>
+      <p:sp>
+        <p:nvSpPr>
+          <p:cNvPr id="13" name="Rounded Rectangle 12"/>
+          <p:cNvSpPr/>
+          <p:nvPr/>
+        </p:nvSpPr>
+        <p:spPr>
+          <a:xfrm>
+            <a:off x="6355080" y="3337560"/>
+            <a:ext cx="5074920" cy="1417320"/>
+          </a:xfrm>
+          <a:prstGeom prst="roundRect">
+            <a:avLst/>
+          </a:prstGeom>
+          <a:solidFill>
+            <a:srgbClr val="EEF4FA"/>
+          </a:solidFill>
+          <a:ln w="12700">
+            <a:solidFill>
+              <a:srgbClr val="C8D5E3"/>
+            </a:solidFill>
+          </a:ln>
+        </p:spPr>
+        <p:style>
+          <a:lnRef idx="1">
+            <a:schemeClr val="accent1"/>
+          </a:lnRef>
+          <a:fillRef idx="3">
+            <a:schemeClr val="accent1"/>
+          </a:fillRef>
+          <a:effectRef idx="2">
+            <a:schemeClr val="accent1"/>
+          </a:effectRef>
+          <a:fontRef idx="minor">
+            <a:schemeClr val="lt1"/>
+          </a:fontRef>
+        </p:style>
+        <p:txBody>
+          <a:bodyPr rtlCol="0" anchor="ctr"/>
+          <a:lstStyle/>
+          <a:p>
+            <a:pPr algn="ctr"/>
+            <a:endParaRPr/>
+          </a:p>
+        </p:txBody>
+      </p:sp>
+      <p:sp>
+        <p:nvSpPr>
+          <p:cNvPr id="14" name="TextBox 13"/>
+          <p:cNvSpPr txBox="1"/>
+          <p:nvPr/>
+        </p:nvSpPr>
+        <p:spPr>
+          <a:xfrm>
+            <a:off x="6519672" y="3465576"/>
+            <a:ext cx="4800600" cy="256032"/>
+          </a:xfrm>
+          <a:prstGeom prst="rect">
+            <a:avLst/>
+          </a:prstGeom>
+          <a:noFill/>
+        </p:spPr>
+        <p:txBody>
+          <a:bodyPr wrap="square" anchor="t">
+            <a:spAutoFit/>
+          </a:bodyPr>
+          <a:lstStyle/>
+          <a:p>
+            <a:pPr algn="l">
+              <a:defRPr sz="1600" b="1">
+                <a:solidFill>
+                  <a:srgbClr val="1F3552"/>
                 </a:solidFill>
                 <a:latin typeface="Aptos"/>
               </a:defRPr>
             </a:pPr>
             <a:r>
-              <a:t>Severe blur or missing detail cannot be perfectly reconstructed.</a:t>
-            </a:r>
-          </a:p>
-          <a:p>
-            <a:pPr>
-              <a:spcAft>
-                <a:spcPts val="1000"/>
-              </a:spcAft>
-              <a:defRPr sz="1800">
-                <a:solidFill>
-                  <a:srgbClr val="203047"/>
+              <a:t>Improvement summary</a:t>
+            </a:r>
+          </a:p>
+        </p:txBody>
+      </p:sp>
+      <p:sp>
+        <p:nvSpPr>
+          <p:cNvPr id="15" name="TextBox 14"/>
+          <p:cNvSpPr txBox="1"/>
+          <p:nvPr/>
+        </p:nvSpPr>
+        <p:spPr>
+          <a:xfrm>
+            <a:off x="6519672" y="3776472"/>
+            <a:ext cx="4800600" cy="914400"/>
+          </a:xfrm>
+          <a:prstGeom prst="rect">
+            <a:avLst/>
+          </a:prstGeom>
+          <a:noFill/>
+        </p:spPr>
+        <p:txBody>
+          <a:bodyPr wrap="square" anchor="t">
+            <a:spAutoFit/>
+          </a:bodyPr>
+          <a:lstStyle/>
+          <a:p>
+            <a:pPr algn="l">
+              <a:defRPr sz="1100" b="0">
+                <a:solidFill>
+                  <a:srgbClr val="617892"/>
                 </a:solidFill>
                 <a:latin typeface="Aptos"/>
               </a:defRPr>
             </a:pPr>
             <a:r>
-              <a:t>Future scope includes face-aware enhancement, document mode, object detection, and segmentation-assisted enhancement.</a:t>
+              <a:t>Metric-wise changes</a:t>
+            </a:r>
+            <a:br/>
+            <a:r>
+              <a:t>Readable improvement statements</a:t>
+            </a:r>
+            <a:br/>
+            <a:r>
+              <a:t>Download option</a:t>
             </a:r>
           </a:p>
         </p:txBody>
